--- a/decks/Immuno_03_Infectious-Disease-Serology.pptx
+++ b/decks/Immuno_03_Infectious-Disease-Serology.pptx
@@ -24,9 +24,13 @@
     <p:sldId id="272" r:id="rId18"/>
     <p:sldId id="273" r:id="rId19"/>
     <p:sldId id="274" r:id="rId20"/>
+    <p:sldId id="283" r:id="rId34"/>
     <p:sldId id="275" r:id="rId21"/>
+    <p:sldId id="282" r:id="rId33"/>
     <p:sldId id="276" r:id="rId22"/>
+    <p:sldId id="281" r:id="rId32"/>
     <p:sldId id="277" r:id="rId23"/>
+    <p:sldId id="280" r:id="rId31"/>
     <p:sldId id="278" r:id="rId24"/>
     <p:sldId id="279" r:id="rId25"/>
   </p:sldIdLst>
@@ -2943,6 +2947,10 @@
           </a:solidFill>
           <a:ln/>
         </p:spPr>
+        <p:txBody>
+          <a:bodyPr/>
+          <a:p/>
+        </p:txBody>
       </p:sp>
       <p:sp>
         <p:nvSpPr>
@@ -2965,6 +2973,10 @@
           </a:solidFill>
           <a:ln/>
         </p:spPr>
+        <p:txBody>
+          <a:bodyPr/>
+          <a:p/>
+        </p:txBody>
       </p:sp>
       <p:sp>
         <p:nvSpPr>
@@ -2987,6 +2999,10 @@
           </a:solidFill>
           <a:ln/>
         </p:spPr>
+        <p:txBody>
+          <a:bodyPr/>
+          <a:p/>
+        </p:txBody>
       </p:sp>
       <p:sp>
         <p:nvSpPr>
@@ -3009,6 +3025,10 @@
           </a:solidFill>
           <a:ln/>
         </p:spPr>
+        <p:txBody>
+          <a:bodyPr/>
+          <a:p/>
+        </p:txBody>
       </p:sp>
       <p:sp>
         <p:nvSpPr>
@@ -4947,6 +4967,10 @@
             </a:outerShdw>
           </a:effectLst>
         </p:spPr>
+        <p:txBody>
+          <a:bodyPr/>
+          <a:p/>
+        </p:txBody>
       </p:sp>
       <p:sp>
         <p:nvSpPr>
@@ -5121,6 +5145,10 @@
             </a:outerShdw>
           </a:effectLst>
         </p:spPr>
+        <p:txBody>
+          <a:bodyPr/>
+          <a:p/>
+        </p:txBody>
       </p:sp>
       <p:sp>
         <p:nvSpPr>
@@ -5426,6 +5454,10 @@
           </a:solidFill>
           <a:ln/>
         </p:spPr>
+        <p:txBody>
+          <a:bodyPr/>
+          <a:p/>
+        </p:txBody>
       </p:sp>
       <p:sp>
         <p:nvSpPr>
@@ -5448,6 +5480,10 @@
           </a:solidFill>
           <a:ln/>
         </p:spPr>
+        <p:txBody>
+          <a:bodyPr/>
+          <a:p/>
+        </p:txBody>
       </p:sp>
       <p:sp>
         <p:nvSpPr>
@@ -5704,6 +5740,10 @@
             </a:outerShdw>
           </a:effectLst>
         </p:spPr>
+        <p:txBody>
+          <a:bodyPr/>
+          <a:p/>
+        </p:txBody>
       </p:sp>
       <p:sp>
         <p:nvSpPr>
@@ -5814,6 +5854,10 @@
             </a:outerShdw>
           </a:effectLst>
         </p:spPr>
+        <p:txBody>
+          <a:bodyPr/>
+          <a:p/>
+        </p:txBody>
       </p:sp>
       <p:sp>
         <p:nvSpPr>
@@ -6243,6 +6287,10 @@
             </a:outerShdw>
           </a:effectLst>
         </p:spPr>
+        <p:txBody>
+          <a:bodyPr/>
+          <a:p/>
+        </p:txBody>
       </p:sp>
       <p:sp>
         <p:nvSpPr>
@@ -6569,6 +6617,10 @@
             </a:outerShdw>
           </a:effectLst>
         </p:spPr>
+        <p:txBody>
+          <a:bodyPr/>
+          <a:p/>
+        </p:txBody>
       </p:sp>
       <p:sp>
         <p:nvSpPr>
@@ -6679,6 +6731,10 @@
             </a:outerShdw>
           </a:effectLst>
         </p:spPr>
+        <p:txBody>
+          <a:bodyPr/>
+          <a:p/>
+        </p:txBody>
       </p:sp>
       <p:sp>
         <p:nvSpPr>
@@ -7108,6 +7164,10 @@
             </a:outerShdw>
           </a:effectLst>
         </p:spPr>
+        <p:txBody>
+          <a:bodyPr/>
+          <a:p/>
+        </p:txBody>
       </p:sp>
       <p:sp>
         <p:nvSpPr>
@@ -7434,6 +7494,10 @@
             </a:outerShdw>
           </a:effectLst>
         </p:spPr>
+        <p:txBody>
+          <a:bodyPr/>
+          <a:p/>
+        </p:txBody>
       </p:sp>
       <p:sp>
         <p:nvSpPr>
@@ -7544,6 +7608,10 @@
             </a:outerShdw>
           </a:effectLst>
         </p:spPr>
+        <p:txBody>
+          <a:bodyPr/>
+          <a:p/>
+        </p:txBody>
       </p:sp>
       <p:sp>
         <p:nvSpPr>
@@ -7973,6 +8041,10 @@
             </a:outerShdw>
           </a:effectLst>
         </p:spPr>
+        <p:txBody>
+          <a:bodyPr/>
+          <a:p/>
+        </p:txBody>
       </p:sp>
       <p:sp>
         <p:nvSpPr>
@@ -8381,9 +8453,9 @@
               <a:buNone/>
             </a:pPr>
             <a:r>
-              <a:rPr lang="en-US" sz="1350" b="1" dirty="0">
-                <a:solidFill>
-                  <a:srgbClr val="4A1269"/>
+              <a:rPr lang="en-US" sz="1350" b="0" dirty="0">
+                <a:solidFill>
+                  <a:srgbClr val="33444F"/>
                 </a:solidFill>
                 <a:latin typeface="Calibri" pitchFamily="34" charset="0"/>
                 <a:ea typeface="Calibri" pitchFamily="34" charset="-122"/>
@@ -8432,130 +8504,6 @@
               <a:t>E. ALT</a:t>
             </a:r>
             <a:endParaRPr lang="en-US" sz="1350" dirty="0"/>
-          </a:p>
-        </p:txBody>
-      </p:sp>
-      <p:sp>
-        <p:nvSpPr>
-          <p:cNvPr id="6" name="Shape 4"/>
-          <p:cNvSpPr/>
-          <p:nvPr/>
-        </p:nvSpPr>
-        <p:spPr>
-          <a:xfrm>
-            <a:off x="7201632" y="2395728"/>
-            <a:ext cx="4423136" cy="3246120"/>
-          </a:xfrm>
-          <a:prstGeom prst="roundRect">
-            <a:avLst>
-              <a:gd name="adj" fmla="val 2535"/>
-            </a:avLst>
-          </a:prstGeom>
-          <a:solidFill>
-            <a:srgbClr val="F1E8F7"/>
-          </a:solidFill>
-          <a:ln/>
-          <a:effectLst>
-            <a:outerShdw sx="100000" sy="100000" kx="0" ky="0" algn="bl" rotWithShape="0" blurRad="88900" dist="25400" dir="5400000">
-              <a:srgbClr val="22303C">
-                <a:alpha val="12000"/>
-              </a:srgbClr>
-            </a:outerShdw>
-          </a:effectLst>
-        </p:spPr>
-      </p:sp>
-      <p:sp>
-        <p:nvSpPr>
-          <p:cNvPr id="7" name="Text 5"/>
-          <p:cNvSpPr/>
-          <p:nvPr/>
-        </p:nvSpPr>
-        <p:spPr>
-          <a:xfrm>
-            <a:off x="7439376" y="2578608"/>
-            <a:ext cx="3965936" cy="457200"/>
-          </a:xfrm>
-          <a:prstGeom prst="rect">
-            <a:avLst/>
-          </a:prstGeom>
-          <a:noFill/>
-          <a:ln/>
-        </p:spPr>
-        <p:txBody>
-          <a:bodyPr wrap="square" lIns="0" tIns="0" rIns="0" bIns="0" rtlCol="0" anchor="ctr"/>
-          <a:lstStyle/>
-          <a:p>
-            <a:pPr indent="0" marL="0">
-              <a:buNone/>
-            </a:pPr>
-            <a:r>
-              <a:rPr lang="en-US" sz="1500" b="1" dirty="0">
-                <a:solidFill>
-                  <a:srgbClr val="6A1B9A"/>
-                </a:solidFill>
-                <a:latin typeface="Calibri" pitchFamily="34" charset="0"/>
-                <a:ea typeface="Calibri" pitchFamily="34" charset="-122"/>
-                <a:cs typeface="Calibri" pitchFamily="34" charset="-120"/>
-              </a:rPr>
-              <a:t>ANSWER  </a:t>
-            </a:r>
-            <a:pPr indent="0" marL="0">
-              <a:buNone/>
-            </a:pPr>
-            <a:r>
-              <a:rPr lang="en-US" sz="1500" b="1" dirty="0">
-                <a:solidFill>
-                  <a:srgbClr val="1B2A38"/>
-                </a:solidFill>
-                <a:latin typeface="Calibri" pitchFamily="34" charset="0"/>
-                <a:ea typeface="Calibri" pitchFamily="34" charset="-122"/>
-                <a:cs typeface="Calibri" pitchFamily="34" charset="-120"/>
-              </a:rPr>
-              <a:t>C — Anti-HBc</a:t>
-            </a:r>
-            <a:endParaRPr lang="en-US" sz="1500" dirty="0"/>
-          </a:p>
-        </p:txBody>
-      </p:sp>
-      <p:sp>
-        <p:nvSpPr>
-          <p:cNvPr id="8" name="Text 6"/>
-          <p:cNvSpPr/>
-          <p:nvPr/>
-        </p:nvSpPr>
-        <p:spPr>
-          <a:xfrm>
-            <a:off x="7439376" y="3127248"/>
-            <a:ext cx="3947648" cy="2377440"/>
-          </a:xfrm>
-          <a:prstGeom prst="rect">
-            <a:avLst/>
-          </a:prstGeom>
-          <a:noFill/>
-          <a:ln/>
-        </p:spPr>
-        <p:txBody>
-          <a:bodyPr wrap="square" lIns="0" tIns="0" rIns="0" bIns="0" rtlCol="0" anchor="t"/>
-          <a:lstStyle/>
-          <a:p>
-            <a:pPr algn="l" indent="0" marL="0">
-              <a:lnSpc>
-                <a:spcPct val="108000"/>
-              </a:lnSpc>
-              <a:buNone/>
-            </a:pPr>
-            <a:r>
-              <a:rPr lang="en-US" sz="1250" dirty="0">
-                <a:solidFill>
-                  <a:srgbClr val="33444F"/>
-                </a:solidFill>
-                <a:latin typeface="Calibri" pitchFamily="34" charset="0"/>
-                <a:ea typeface="Calibri" pitchFamily="34" charset="-122"/>
-                <a:cs typeface="Calibri" pitchFamily="34" charset="-120"/>
-              </a:rPr>
-              <a:t>Anti-HBc develops after natural infection but not after vaccination; anti-HBs alone can result from either.</a:t>
-            </a:r>
-            <a:endParaRPr lang="en-US" sz="1250" dirty="0"/>
           </a:p>
         </p:txBody>
       </p:sp>
@@ -8803,6 +8751,10 @@
             </a:outerShdw>
           </a:effectLst>
         </p:spPr>
+        <p:txBody>
+          <a:bodyPr/>
+          <a:p/>
+        </p:txBody>
       </p:sp>
       <p:sp>
         <p:nvSpPr>
@@ -8910,6 +8862,10 @@
             </a:outerShdw>
           </a:effectLst>
         </p:spPr>
+        <p:txBody>
+          <a:bodyPr/>
+          <a:p/>
+        </p:txBody>
       </p:sp>
       <p:sp>
         <p:nvSpPr>
@@ -9017,6 +8973,10 @@
             </a:outerShdw>
           </a:effectLst>
         </p:spPr>
+        <p:txBody>
+          <a:bodyPr/>
+          <a:p/>
+        </p:txBody>
       </p:sp>
       <p:sp>
         <p:nvSpPr>
@@ -9124,6 +9084,10 @@
             </a:outerShdw>
           </a:effectLst>
         </p:spPr>
+        <p:txBody>
+          <a:bodyPr/>
+          <a:p/>
+        </p:txBody>
       </p:sp>
       <p:sp>
         <p:nvSpPr>
@@ -9536,9 +9500,9 @@
               <a:buNone/>
             </a:pPr>
             <a:r>
-              <a:rPr lang="en-US" sz="1350" b="1" dirty="0">
-                <a:solidFill>
-                  <a:srgbClr val="4A1269"/>
+              <a:rPr lang="en-US" sz="1350" b="0" dirty="0">
+                <a:solidFill>
+                  <a:srgbClr val="33444F"/>
                 </a:solidFill>
                 <a:latin typeface="Calibri" pitchFamily="34" charset="0"/>
                 <a:ea typeface="Calibri" pitchFamily="34" charset="-122"/>
@@ -9587,130 +9551,6 @@
               <a:t>E. No testing</a:t>
             </a:r>
             <a:endParaRPr lang="en-US" sz="1350" dirty="0"/>
-          </a:p>
-        </p:txBody>
-      </p:sp>
-      <p:sp>
-        <p:nvSpPr>
-          <p:cNvPr id="6" name="Shape 4"/>
-          <p:cNvSpPr/>
-          <p:nvPr/>
-        </p:nvSpPr>
-        <p:spPr>
-          <a:xfrm>
-            <a:off x="7201632" y="2395728"/>
-            <a:ext cx="4423136" cy="3246120"/>
-          </a:xfrm>
-          <a:prstGeom prst="roundRect">
-            <a:avLst>
-              <a:gd name="adj" fmla="val 2535"/>
-            </a:avLst>
-          </a:prstGeom>
-          <a:solidFill>
-            <a:srgbClr val="F1E8F7"/>
-          </a:solidFill>
-          <a:ln/>
-          <a:effectLst>
-            <a:outerShdw sx="100000" sy="100000" kx="0" ky="0" algn="bl" rotWithShape="0" blurRad="88900" dist="25400" dir="5400000">
-              <a:srgbClr val="22303C">
-                <a:alpha val="12000"/>
-              </a:srgbClr>
-            </a:outerShdw>
-          </a:effectLst>
-        </p:spPr>
-      </p:sp>
-      <p:sp>
-        <p:nvSpPr>
-          <p:cNvPr id="7" name="Text 5"/>
-          <p:cNvSpPr/>
-          <p:nvPr/>
-        </p:nvSpPr>
-        <p:spPr>
-          <a:xfrm>
-            <a:off x="7439376" y="2578608"/>
-            <a:ext cx="3965936" cy="457200"/>
-          </a:xfrm>
-          <a:prstGeom prst="rect">
-            <a:avLst/>
-          </a:prstGeom>
-          <a:noFill/>
-          <a:ln/>
-        </p:spPr>
-        <p:txBody>
-          <a:bodyPr wrap="square" lIns="0" tIns="0" rIns="0" bIns="0" rtlCol="0" anchor="ctr"/>
-          <a:lstStyle/>
-          <a:p>
-            <a:pPr indent="0" marL="0">
-              <a:buNone/>
-            </a:pPr>
-            <a:r>
-              <a:rPr lang="en-US" sz="1500" b="1" dirty="0">
-                <a:solidFill>
-                  <a:srgbClr val="6A1B9A"/>
-                </a:solidFill>
-                <a:latin typeface="Calibri" pitchFamily="34" charset="0"/>
-                <a:ea typeface="Calibri" pitchFamily="34" charset="-122"/>
-                <a:cs typeface="Calibri" pitchFamily="34" charset="-120"/>
-              </a:rPr>
-              <a:t>ANSWER  </a:t>
-            </a:r>
-            <a:pPr indent="0" marL="0">
-              <a:buNone/>
-            </a:pPr>
-            <a:r>
-              <a:rPr lang="en-US" sz="1500" b="1" dirty="0">
-                <a:solidFill>
-                  <a:srgbClr val="1B2A38"/>
-                </a:solidFill>
-                <a:latin typeface="Calibri" pitchFamily="34" charset="0"/>
-                <a:ea typeface="Calibri" pitchFamily="34" charset="-122"/>
-                <a:cs typeface="Calibri" pitchFamily="34" charset="-120"/>
-              </a:rPr>
-              <a:t>C — Antigen or NAAT</a:t>
-            </a:r>
-            <a:endParaRPr lang="en-US" sz="1500" dirty="0"/>
-          </a:p>
-        </p:txBody>
-      </p:sp>
-      <p:sp>
-        <p:nvSpPr>
-          <p:cNvPr id="8" name="Text 6"/>
-          <p:cNvSpPr/>
-          <p:nvPr/>
-        </p:nvSpPr>
-        <p:spPr>
-          <a:xfrm>
-            <a:off x="7439376" y="3127248"/>
-            <a:ext cx="3947648" cy="2377440"/>
-          </a:xfrm>
-          <a:prstGeom prst="rect">
-            <a:avLst/>
-          </a:prstGeom>
-          <a:noFill/>
-          <a:ln/>
-        </p:spPr>
-        <p:txBody>
-          <a:bodyPr wrap="square" lIns="0" tIns="0" rIns="0" bIns="0" rtlCol="0" anchor="t"/>
-          <a:lstStyle/>
-          <a:p>
-            <a:pPr algn="l" indent="0" marL="0">
-              <a:lnSpc>
-                <a:spcPct val="108000"/>
-              </a:lnSpc>
-              <a:buNone/>
-            </a:pPr>
-            <a:r>
-              <a:rPr lang="en-US" sz="1250" dirty="0">
-                <a:solidFill>
-                  <a:srgbClr val="33444F"/>
-                </a:solidFill>
-                <a:latin typeface="Calibri" pitchFamily="34" charset="0"/>
-                <a:ea typeface="Calibri" pitchFamily="34" charset="-122"/>
-                <a:cs typeface="Calibri" pitchFamily="34" charset="-120"/>
-              </a:rPr>
-              <a:t>Antibodies may be undetectable early; antigen and nucleic acid tests detect infection during the window.</a:t>
-            </a:r>
-            <a:endParaRPr lang="en-US" sz="1250" dirty="0"/>
           </a:p>
         </p:txBody>
       </p:sp>
@@ -10020,9 +9860,9 @@
               <a:buNone/>
             </a:pPr>
             <a:r>
-              <a:rPr lang="en-US" sz="1350" b="1" dirty="0">
-                <a:solidFill>
-                  <a:srgbClr val="4A1269"/>
+              <a:rPr lang="en-US" sz="1350" b="0" dirty="0">
+                <a:solidFill>
+                  <a:srgbClr val="33444F"/>
                 </a:solidFill>
                 <a:latin typeface="Calibri" pitchFamily="34" charset="0"/>
                 <a:ea typeface="Calibri" pitchFamily="34" charset="-122"/>
@@ -10091,130 +9931,6 @@
               <a:t>E. Viral culture</a:t>
             </a:r>
             <a:endParaRPr lang="en-US" sz="1350" dirty="0"/>
-          </a:p>
-        </p:txBody>
-      </p:sp>
-      <p:sp>
-        <p:nvSpPr>
-          <p:cNvPr id="6" name="Shape 4"/>
-          <p:cNvSpPr/>
-          <p:nvPr/>
-        </p:nvSpPr>
-        <p:spPr>
-          <a:xfrm>
-            <a:off x="7201632" y="2395728"/>
-            <a:ext cx="4423136" cy="3246120"/>
-          </a:xfrm>
-          <a:prstGeom prst="roundRect">
-            <a:avLst>
-              <a:gd name="adj" fmla="val 2535"/>
-            </a:avLst>
-          </a:prstGeom>
-          <a:solidFill>
-            <a:srgbClr val="F1E8F7"/>
-          </a:solidFill>
-          <a:ln/>
-          <a:effectLst>
-            <a:outerShdw sx="100000" sy="100000" kx="0" ky="0" algn="bl" rotWithShape="0" blurRad="88900" dist="25400" dir="5400000">
-              <a:srgbClr val="22303C">
-                <a:alpha val="12000"/>
-              </a:srgbClr>
-            </a:outerShdw>
-          </a:effectLst>
-        </p:spPr>
-      </p:sp>
-      <p:sp>
-        <p:nvSpPr>
-          <p:cNvPr id="7" name="Text 5"/>
-          <p:cNvSpPr/>
-          <p:nvPr/>
-        </p:nvSpPr>
-        <p:spPr>
-          <a:xfrm>
-            <a:off x="7439376" y="2578608"/>
-            <a:ext cx="3965936" cy="457200"/>
-          </a:xfrm>
-          <a:prstGeom prst="rect">
-            <a:avLst/>
-          </a:prstGeom>
-          <a:noFill/>
-          <a:ln/>
-        </p:spPr>
-        <p:txBody>
-          <a:bodyPr wrap="square" lIns="0" tIns="0" rIns="0" bIns="0" rtlCol="0" anchor="ctr"/>
-          <a:lstStyle/>
-          <a:p>
-            <a:pPr indent="0" marL="0">
-              <a:buNone/>
-            </a:pPr>
-            <a:r>
-              <a:rPr lang="en-US" sz="1500" b="1" dirty="0">
-                <a:solidFill>
-                  <a:srgbClr val="6A1B9A"/>
-                </a:solidFill>
-                <a:latin typeface="Calibri" pitchFamily="34" charset="0"/>
-                <a:ea typeface="Calibri" pitchFamily="34" charset="-122"/>
-                <a:cs typeface="Calibri" pitchFamily="34" charset="-120"/>
-              </a:rPr>
-              <a:t>ANSWER  </a:t>
-            </a:r>
-            <a:pPr indent="0" marL="0">
-              <a:buNone/>
-            </a:pPr>
-            <a:r>
-              <a:rPr lang="en-US" sz="1500" b="1" dirty="0">
-                <a:solidFill>
-                  <a:srgbClr val="1B2A38"/>
-                </a:solidFill>
-                <a:latin typeface="Calibri" pitchFamily="34" charset="0"/>
-                <a:ea typeface="Calibri" pitchFamily="34" charset="-122"/>
-                <a:cs typeface="Calibri" pitchFamily="34" charset="-120"/>
-              </a:rPr>
-              <a:t>B — HIV-1/2 differentiation assay</a:t>
-            </a:r>
-            <a:endParaRPr lang="en-US" sz="1500" dirty="0"/>
-          </a:p>
-        </p:txBody>
-      </p:sp>
-      <p:sp>
-        <p:nvSpPr>
-          <p:cNvPr id="8" name="Text 6"/>
-          <p:cNvSpPr/>
-          <p:nvPr/>
-        </p:nvSpPr>
-        <p:spPr>
-          <a:xfrm>
-            <a:off x="7439376" y="3127248"/>
-            <a:ext cx="3947648" cy="2377440"/>
-          </a:xfrm>
-          <a:prstGeom prst="rect">
-            <a:avLst/>
-          </a:prstGeom>
-          <a:noFill/>
-          <a:ln/>
-        </p:spPr>
-        <p:txBody>
-          <a:bodyPr wrap="square" lIns="0" tIns="0" rIns="0" bIns="0" rtlCol="0" anchor="t"/>
-          <a:lstStyle/>
-          <a:p>
-            <a:pPr algn="l" indent="0" marL="0">
-              <a:lnSpc>
-                <a:spcPct val="108000"/>
-              </a:lnSpc>
-              <a:buNone/>
-            </a:pPr>
-            <a:r>
-              <a:rPr lang="en-US" sz="1250" dirty="0">
-                <a:solidFill>
-                  <a:srgbClr val="33444F"/>
-                </a:solidFill>
-                <a:latin typeface="Calibri" pitchFamily="34" charset="0"/>
-                <a:ea typeface="Calibri" pitchFamily="34" charset="-122"/>
-                <a:cs typeface="Calibri" pitchFamily="34" charset="-120"/>
-              </a:rPr>
-              <a:t>A reactive 4th-generation screen reflexes to an antibody differentiation assay; discordance prompts HIV-1 RNA.</a:t>
-            </a:r>
-            <a:endParaRPr lang="en-US" sz="1250" dirty="0"/>
           </a:p>
         </p:txBody>
       </p:sp>
@@ -10524,9 +10240,9 @@
               <a:buNone/>
             </a:pPr>
             <a:r>
-              <a:rPr lang="en-US" sz="1350" b="1" dirty="0">
-                <a:solidFill>
-                  <a:srgbClr val="4A1269"/>
+              <a:rPr lang="en-US" sz="1350" b="0" dirty="0">
+                <a:solidFill>
+                  <a:srgbClr val="33444F"/>
                 </a:solidFill>
                 <a:latin typeface="Calibri" pitchFamily="34" charset="0"/>
                 <a:ea typeface="Calibri" pitchFamily="34" charset="-122"/>
@@ -10595,130 +10311,6 @@
               <a:t>E. Diagnose neurosyphilis alone</a:t>
             </a:r>
             <a:endParaRPr lang="en-US" sz="1350" dirty="0"/>
-          </a:p>
-        </p:txBody>
-      </p:sp>
-      <p:sp>
-        <p:nvSpPr>
-          <p:cNvPr id="6" name="Shape 4"/>
-          <p:cNvSpPr/>
-          <p:nvPr/>
-        </p:nvSpPr>
-        <p:spPr>
-          <a:xfrm>
-            <a:off x="7201632" y="2395728"/>
-            <a:ext cx="4423136" cy="3246120"/>
-          </a:xfrm>
-          <a:prstGeom prst="roundRect">
-            <a:avLst>
-              <a:gd name="adj" fmla="val 2535"/>
-            </a:avLst>
-          </a:prstGeom>
-          <a:solidFill>
-            <a:srgbClr val="F1E8F7"/>
-          </a:solidFill>
-          <a:ln/>
-          <a:effectLst>
-            <a:outerShdw sx="100000" sy="100000" kx="0" ky="0" algn="bl" rotWithShape="0" blurRad="88900" dist="25400" dir="5400000">
-              <a:srgbClr val="22303C">
-                <a:alpha val="12000"/>
-              </a:srgbClr>
-            </a:outerShdw>
-          </a:effectLst>
-        </p:spPr>
-      </p:sp>
-      <p:sp>
-        <p:nvSpPr>
-          <p:cNvPr id="7" name="Text 5"/>
-          <p:cNvSpPr/>
-          <p:nvPr/>
-        </p:nvSpPr>
-        <p:spPr>
-          <a:xfrm>
-            <a:off x="7439376" y="2578608"/>
-            <a:ext cx="3965936" cy="457200"/>
-          </a:xfrm>
-          <a:prstGeom prst="rect">
-            <a:avLst/>
-          </a:prstGeom>
-          <a:noFill/>
-          <a:ln/>
-        </p:spPr>
-        <p:txBody>
-          <a:bodyPr wrap="square" lIns="0" tIns="0" rIns="0" bIns="0" rtlCol="0" anchor="ctr"/>
-          <a:lstStyle/>
-          <a:p>
-            <a:pPr indent="0" marL="0">
-              <a:buNone/>
-            </a:pPr>
-            <a:r>
-              <a:rPr lang="en-US" sz="1500" b="1" dirty="0">
-                <a:solidFill>
-                  <a:srgbClr val="6A1B9A"/>
-                </a:solidFill>
-                <a:latin typeface="Calibri" pitchFamily="34" charset="0"/>
-                <a:ea typeface="Calibri" pitchFamily="34" charset="-122"/>
-                <a:cs typeface="Calibri" pitchFamily="34" charset="-120"/>
-              </a:rPr>
-              <a:t>ANSWER  </a:t>
-            </a:r>
-            <a:pPr indent="0" marL="0">
-              <a:buNone/>
-            </a:pPr>
-            <a:r>
-              <a:rPr lang="en-US" sz="1500" b="1" dirty="0">
-                <a:solidFill>
-                  <a:srgbClr val="1B2A38"/>
-                </a:solidFill>
-                <a:latin typeface="Calibri" pitchFamily="34" charset="0"/>
-                <a:ea typeface="Calibri" pitchFamily="34" charset="-122"/>
-                <a:cs typeface="Calibri" pitchFamily="34" charset="-120"/>
-              </a:rPr>
-              <a:t>B — Monitor activity/treatment</a:t>
-            </a:r>
-            <a:endParaRPr lang="en-US" sz="1500" dirty="0"/>
-          </a:p>
-        </p:txBody>
-      </p:sp>
-      <p:sp>
-        <p:nvSpPr>
-          <p:cNvPr id="8" name="Text 6"/>
-          <p:cNvSpPr/>
-          <p:nvPr/>
-        </p:nvSpPr>
-        <p:spPr>
-          <a:xfrm>
-            <a:off x="7439376" y="3127248"/>
-            <a:ext cx="3947648" cy="2377440"/>
-          </a:xfrm>
-          <a:prstGeom prst="rect">
-            <a:avLst/>
-          </a:prstGeom>
-          <a:noFill/>
-          <a:ln/>
-        </p:spPr>
-        <p:txBody>
-          <a:bodyPr wrap="square" lIns="0" tIns="0" rIns="0" bIns="0" rtlCol="0" anchor="t"/>
-          <a:lstStyle/>
-          <a:p>
-            <a:pPr algn="l" indent="0" marL="0">
-              <a:lnSpc>
-                <a:spcPct val="108000"/>
-              </a:lnSpc>
-              <a:buNone/>
-            </a:pPr>
-            <a:r>
-              <a:rPr lang="en-US" sz="1250" dirty="0">
-                <a:solidFill>
-                  <a:srgbClr val="33444F"/>
-                </a:solidFill>
-                <a:latin typeface="Calibri" pitchFamily="34" charset="0"/>
-                <a:ea typeface="Calibri" pitchFamily="34" charset="-122"/>
-                <a:cs typeface="Calibri" pitchFamily="34" charset="-120"/>
-              </a:rPr>
-              <a:t>Non-treponemal titers fall with successful treatment; treponemal tests usually remain reactive for life.</a:t>
-            </a:r>
-            <a:endParaRPr lang="en-US" sz="1250" dirty="0"/>
           </a:p>
         </p:txBody>
       </p:sp>
@@ -10959,6 +10551,10 @@
           </a:solidFill>
           <a:ln/>
         </p:spPr>
+        <p:txBody>
+          <a:bodyPr/>
+          <a:p/>
+        </p:txBody>
       </p:sp>
       <p:sp>
         <p:nvSpPr>
@@ -10986,6 +10582,10 @@
             </a:outerShdw>
           </a:effectLst>
         </p:spPr>
+        <p:txBody>
+          <a:bodyPr/>
+          <a:p/>
+        </p:txBody>
       </p:sp>
       <p:sp>
         <p:nvSpPr>
@@ -11086,6 +10686,10 @@
           </a:solidFill>
           <a:ln/>
         </p:spPr>
+        <p:txBody>
+          <a:bodyPr/>
+          <a:p/>
+        </p:txBody>
       </p:sp>
       <p:sp>
         <p:nvSpPr>
@@ -11113,6 +10717,10 @@
             </a:outerShdw>
           </a:effectLst>
         </p:spPr>
+        <p:txBody>
+          <a:bodyPr/>
+          <a:p/>
+        </p:txBody>
       </p:sp>
       <p:sp>
         <p:nvSpPr>
@@ -11213,6 +10821,10 @@
           </a:solidFill>
           <a:ln/>
         </p:spPr>
+        <p:txBody>
+          <a:bodyPr/>
+          <a:p/>
+        </p:txBody>
       </p:sp>
       <p:sp>
         <p:nvSpPr>
@@ -11240,6 +10852,10 @@
             </a:outerShdw>
           </a:effectLst>
         </p:spPr>
+        <p:txBody>
+          <a:bodyPr/>
+          <a:p/>
+        </p:txBody>
       </p:sp>
       <p:sp>
         <p:nvSpPr>
@@ -11340,6 +10956,10 @@
           </a:solidFill>
           <a:ln/>
         </p:spPr>
+        <p:txBody>
+          <a:bodyPr/>
+          <a:p/>
+        </p:txBody>
       </p:sp>
       <p:sp>
         <p:nvSpPr>
@@ -11367,6 +10987,10 @@
             </a:outerShdw>
           </a:effectLst>
         </p:spPr>
+        <p:txBody>
+          <a:bodyPr/>
+          <a:p/>
+        </p:txBody>
       </p:sp>
       <p:sp>
         <p:nvSpPr>
@@ -11467,6 +11091,10 @@
           </a:solidFill>
           <a:ln/>
         </p:spPr>
+        <p:txBody>
+          <a:bodyPr/>
+          <a:p/>
+        </p:txBody>
       </p:sp>
       <p:sp>
         <p:nvSpPr>
@@ -11494,6 +11122,10 @@
             </a:outerShdw>
           </a:effectLst>
         </p:spPr>
+        <p:txBody>
+          <a:bodyPr/>
+          <a:p/>
+        </p:txBody>
       </p:sp>
       <p:sp>
         <p:nvSpPr>
@@ -11977,6 +11609,1982 @@
 </p:sld>
 </file>
 
+<file path=ppt/slides/slide25.xml><?xml version="1.0" encoding="utf-8"?>
+<p:sld xmlns:a="http://schemas.openxmlformats.org/drawingml/2006/main" xmlns:p="http://schemas.openxmlformats.org/presentationml/2006/main" xmlns:r="http://schemas.openxmlformats.org/officeDocument/2006/relationships">
+  <p:cSld>
+    <p:spTree>
+      <p:nvGrpSpPr>
+        <p:cNvPr id="1" name=""/>
+        <p:cNvGrpSpPr/>
+        <p:nvPr/>
+      </p:nvGrpSpPr>
+      <p:grpSpPr/>
+      <p:sp>
+        <p:nvSpPr>
+          <p:cNvPr id="2" name="Text 0"/>
+          <p:cNvSpPr/>
+          <p:nvPr/>
+        </p:nvSpPr>
+        <p:spPr>
+          <a:xfrm>
+            <a:off x="566928" y="329184"/>
+            <a:ext cx="10515600" cy="310896"/>
+          </a:xfrm>
+          <a:prstGeom prst="rect">
+            <a:avLst/>
+          </a:prstGeom>
+          <a:noFill/>
+          <a:ln/>
+        </p:spPr>
+        <p:txBody>
+          <a:bodyPr wrap="square" lIns="0" tIns="0" rIns="0" bIns="0" rtlCol="0" anchor="ctr"/>
+          <a:lstStyle/>
+          <a:p>
+            <a:pPr algn="l" indent="0" marL="0">
+              <a:buNone/>
+            </a:pPr>
+            <a:r>
+              <a:rPr lang="en-US" sz="1100" b="1" spc="150" kern="0" dirty="0">
+                <a:solidFill>
+                  <a:srgbClr val="6A1B9A"/>
+                </a:solidFill>
+                <a:latin typeface="Calibri" pitchFamily="34" charset="0"/>
+                <a:ea typeface="Calibri" pitchFamily="34" charset="-122"/>
+                <a:cs typeface="Calibri" pitchFamily="34" charset="-120"/>
+              </a:rPr>
+              <a:t>IMMUNOLOGY &amp; SEROLOGY   ·   BOARD REVIEW  ·  Q4</a:t>
+            </a:r>
+            <a:endParaRPr lang="en-US" sz="1100" dirty="0"/>
+          </a:p>
+        </p:txBody>
+      </p:sp>
+      <p:sp>
+        <p:nvSpPr>
+          <p:cNvPr id="3" name="Text 1"/>
+          <p:cNvSpPr/>
+          <p:nvPr/>
+        </p:nvSpPr>
+        <p:spPr>
+          <a:xfrm>
+            <a:off x="566928" y="713232"/>
+            <a:ext cx="11064240" cy="749808"/>
+          </a:xfrm>
+          <a:prstGeom prst="rect">
+            <a:avLst/>
+          </a:prstGeom>
+          <a:noFill/>
+          <a:ln/>
+        </p:spPr>
+        <p:txBody>
+          <a:bodyPr wrap="square" lIns="0" tIns="0" rIns="0" bIns="0" rtlCol="0" anchor="ctr"/>
+          <a:lstStyle/>
+          <a:p>
+            <a:pPr algn="l" indent="0" marL="0">
+              <a:buNone/>
+            </a:pPr>
+            <a:r>
+              <a:rPr lang="en-US" sz="2600" b="1" dirty="0">
+                <a:solidFill>
+                  <a:srgbClr val="0E3A5F"/>
+                </a:solidFill>
+                <a:latin typeface="Calibri" pitchFamily="34" charset="0"/>
+                <a:ea typeface="Calibri" pitchFamily="34" charset="-122"/>
+                <a:cs typeface="Calibri" pitchFamily="34" charset="-120"/>
+              </a:rPr>
+              <a:t>Board-Style Review</a:t>
+            </a:r>
+            <a:endParaRPr lang="en-US" sz="2600" dirty="0"/>
+          </a:p>
+        </p:txBody>
+      </p:sp>
+      <p:sp>
+        <p:nvSpPr>
+          <p:cNvPr id="4" name="Text 2"/>
+          <p:cNvSpPr/>
+          <p:nvPr/>
+        </p:nvSpPr>
+        <p:spPr>
+          <a:xfrm>
+            <a:off x="566928" y="1417320"/>
+            <a:ext cx="11057839" cy="914400"/>
+          </a:xfrm>
+          <a:prstGeom prst="rect">
+            <a:avLst/>
+          </a:prstGeom>
+          <a:noFill/>
+          <a:ln/>
+        </p:spPr>
+        <p:txBody>
+          <a:bodyPr wrap="square" lIns="0" tIns="0" rIns="0" bIns="0" rtlCol="0" anchor="t"/>
+          <a:lstStyle/>
+          <a:p>
+            <a:pPr algn="l" indent="0" marL="0">
+              <a:lnSpc>
+                <a:spcPct val="105000"/>
+              </a:lnSpc>
+              <a:buNone/>
+            </a:pPr>
+            <a:r>
+              <a:rPr lang="en-US" sz="1450" b="1" dirty="0">
+                <a:solidFill>
+                  <a:srgbClr val="1B2A38"/>
+                </a:solidFill>
+                <a:latin typeface="Calibri" pitchFamily="34" charset="0"/>
+                <a:ea typeface="Calibri" pitchFamily="34" charset="-122"/>
+                <a:cs typeface="Calibri" pitchFamily="34" charset="-120"/>
+              </a:rPr>
+              <a:t>Non-treponemal titers (e.g., RPR) are primarily used to:</a:t>
+            </a:r>
+            <a:endParaRPr lang="en-US" sz="1450" dirty="0"/>
+          </a:p>
+        </p:txBody>
+      </p:sp>
+      <p:sp>
+        <p:nvSpPr>
+          <p:cNvPr id="5" name="Text 3"/>
+          <p:cNvSpPr/>
+          <p:nvPr/>
+        </p:nvSpPr>
+        <p:spPr>
+          <a:xfrm>
+            <a:off x="658368" y="2395728"/>
+            <a:ext cx="6192390" cy="3017520"/>
+          </a:xfrm>
+          <a:prstGeom prst="rect">
+            <a:avLst/>
+          </a:prstGeom>
+          <a:noFill/>
+          <a:ln/>
+        </p:spPr>
+        <p:txBody>
+          <a:bodyPr wrap="square" lIns="0" tIns="0" rIns="0" bIns="0" rtlCol="0" anchor="t"/>
+          <a:lstStyle/>
+          <a:p>
+            <a:pPr algn="l" indent="0" marL="0">
+              <a:spcAft>
+                <a:spcPts val="600"/>
+              </a:spcAft>
+              <a:buNone/>
+            </a:pPr>
+            <a:r>
+              <a:rPr lang="en-US" sz="1350" dirty="0">
+                <a:solidFill>
+                  <a:srgbClr val="33444F"/>
+                </a:solidFill>
+                <a:latin typeface="Calibri" pitchFamily="34" charset="0"/>
+                <a:ea typeface="Calibri" pitchFamily="34" charset="-122"/>
+                <a:cs typeface="Calibri" pitchFamily="34" charset="-120"/>
+              </a:rPr>
+              <a:t>A. Confirm lifelong infection</a:t>
+            </a:r>
+            <a:endParaRPr lang="en-US" sz="1350" dirty="0"/>
+          </a:p>
+          <a:p>
+            <a:pPr algn="l" indent="0" marL="0">
+              <a:spcAft>
+                <a:spcPts val="600"/>
+              </a:spcAft>
+              <a:buNone/>
+            </a:pPr>
+            <a:r>
+              <a:rPr lang="en-US" sz="1350" b="1" dirty="0">
+                <a:solidFill>
+                  <a:srgbClr val="4A1269"/>
+                </a:solidFill>
+                <a:latin typeface="Calibri" pitchFamily="34" charset="0"/>
+                <a:ea typeface="Calibri" pitchFamily="34" charset="-122"/>
+                <a:cs typeface="Calibri" pitchFamily="34" charset="-120"/>
+              </a:rPr>
+              <a:t>B. Monitor disease activity and treatment response</a:t>
+            </a:r>
+            <a:endParaRPr lang="en-US" sz="1350" dirty="0"/>
+          </a:p>
+          <a:p>
+            <a:pPr algn="l" indent="0" marL="0">
+              <a:spcAft>
+                <a:spcPts val="600"/>
+              </a:spcAft>
+              <a:buNone/>
+            </a:pPr>
+            <a:r>
+              <a:rPr lang="en-US" sz="1350" dirty="0">
+                <a:solidFill>
+                  <a:srgbClr val="33444F"/>
+                </a:solidFill>
+                <a:latin typeface="Calibri" pitchFamily="34" charset="0"/>
+                <a:ea typeface="Calibri" pitchFamily="34" charset="-122"/>
+                <a:cs typeface="Calibri" pitchFamily="34" charset="-120"/>
+              </a:rPr>
+              <a:t>C. Detect the window period</a:t>
+            </a:r>
+            <a:endParaRPr lang="en-US" sz="1350" dirty="0"/>
+          </a:p>
+          <a:p>
+            <a:pPr algn="l" indent="0" marL="0">
+              <a:spcAft>
+                <a:spcPts val="600"/>
+              </a:spcAft>
+              <a:buNone/>
+            </a:pPr>
+            <a:r>
+              <a:rPr lang="en-US" sz="1350" dirty="0">
+                <a:solidFill>
+                  <a:srgbClr val="33444F"/>
+                </a:solidFill>
+                <a:latin typeface="Calibri" pitchFamily="34" charset="0"/>
+                <a:ea typeface="Calibri" pitchFamily="34" charset="-122"/>
+                <a:cs typeface="Calibri" pitchFamily="34" charset="-120"/>
+              </a:rPr>
+              <a:t>D. Replace treponemal testing</a:t>
+            </a:r>
+            <a:endParaRPr lang="en-US" sz="1350" dirty="0"/>
+          </a:p>
+          <a:p>
+            <a:pPr algn="l" indent="0" marL="0">
+              <a:spcAft>
+                <a:spcPts val="600"/>
+              </a:spcAft>
+              <a:buNone/>
+            </a:pPr>
+            <a:r>
+              <a:rPr lang="en-US" sz="1350" dirty="0">
+                <a:solidFill>
+                  <a:srgbClr val="33444F"/>
+                </a:solidFill>
+                <a:latin typeface="Calibri" pitchFamily="34" charset="0"/>
+                <a:ea typeface="Calibri" pitchFamily="34" charset="-122"/>
+                <a:cs typeface="Calibri" pitchFamily="34" charset="-120"/>
+              </a:rPr>
+              <a:t>E. Diagnose neurosyphilis alone</a:t>
+            </a:r>
+            <a:endParaRPr lang="en-US" sz="1350" dirty="0"/>
+          </a:p>
+        </p:txBody>
+      </p:sp>
+      <p:sp>
+        <p:nvSpPr>
+          <p:cNvPr id="6" name="Shape 4"/>
+          <p:cNvSpPr/>
+          <p:nvPr/>
+        </p:nvSpPr>
+        <p:spPr>
+          <a:xfrm>
+            <a:off x="7201632" y="2395728"/>
+            <a:ext cx="4423136" cy="3246120"/>
+          </a:xfrm>
+          <a:prstGeom prst="roundRect">
+            <a:avLst>
+              <a:gd name="adj" fmla="val 2535"/>
+            </a:avLst>
+          </a:prstGeom>
+          <a:solidFill>
+            <a:srgbClr val="F1E8F7"/>
+          </a:solidFill>
+          <a:ln/>
+          <a:effectLst>
+            <a:outerShdw sx="100000" sy="100000" kx="0" ky="0" algn="bl" rotWithShape="0" blurRad="88900" dist="25400" dir="5400000">
+              <a:srgbClr val="22303C">
+                <a:alpha val="12000"/>
+              </a:srgbClr>
+            </a:outerShdw>
+          </a:effectLst>
+        </p:spPr>
+        <p:txBody>
+          <a:bodyPr/>
+          <a:p/>
+        </p:txBody>
+      </p:sp>
+      <p:sp>
+        <p:nvSpPr>
+          <p:cNvPr id="7" name="Text 5"/>
+          <p:cNvSpPr/>
+          <p:nvPr/>
+        </p:nvSpPr>
+        <p:spPr>
+          <a:xfrm>
+            <a:off x="7439376" y="2578608"/>
+            <a:ext cx="3965936" cy="457200"/>
+          </a:xfrm>
+          <a:prstGeom prst="rect">
+            <a:avLst/>
+          </a:prstGeom>
+          <a:noFill/>
+          <a:ln/>
+        </p:spPr>
+        <p:txBody>
+          <a:bodyPr wrap="square" lIns="0" tIns="0" rIns="0" bIns="0" rtlCol="0" anchor="ctr"/>
+          <a:lstStyle/>
+          <a:p>
+            <a:pPr indent="0" marL="0">
+              <a:buNone/>
+            </a:pPr>
+            <a:r>
+              <a:rPr lang="en-US" sz="1500" b="1" dirty="0">
+                <a:solidFill>
+                  <a:srgbClr val="6A1B9A"/>
+                </a:solidFill>
+                <a:latin typeface="Calibri" pitchFamily="34" charset="0"/>
+                <a:ea typeface="Calibri" pitchFamily="34" charset="-122"/>
+                <a:cs typeface="Calibri" pitchFamily="34" charset="-120"/>
+              </a:rPr>
+              <a:t>ANSWER  </a:t>
+            </a:r>
+            <a:pPr indent="0" marL="0">
+              <a:buNone/>
+            </a:pPr>
+            <a:r>
+              <a:rPr lang="en-US" sz="1500" b="1" dirty="0">
+                <a:solidFill>
+                  <a:srgbClr val="1B2A38"/>
+                </a:solidFill>
+                <a:latin typeface="Calibri" pitchFamily="34" charset="0"/>
+                <a:ea typeface="Calibri" pitchFamily="34" charset="-122"/>
+                <a:cs typeface="Calibri" pitchFamily="34" charset="-120"/>
+              </a:rPr>
+              <a:t>B — Monitor activity/treatment</a:t>
+            </a:r>
+            <a:endParaRPr lang="en-US" sz="1500" dirty="0"/>
+          </a:p>
+        </p:txBody>
+      </p:sp>
+      <p:sp>
+        <p:nvSpPr>
+          <p:cNvPr id="8" name="Text 6"/>
+          <p:cNvSpPr/>
+          <p:nvPr/>
+        </p:nvSpPr>
+        <p:spPr>
+          <a:xfrm>
+            <a:off x="7439376" y="3127248"/>
+            <a:ext cx="3947648" cy="2377440"/>
+          </a:xfrm>
+          <a:prstGeom prst="rect">
+            <a:avLst/>
+          </a:prstGeom>
+          <a:noFill/>
+          <a:ln/>
+        </p:spPr>
+        <p:txBody>
+          <a:bodyPr wrap="square" lIns="0" tIns="0" rIns="0" bIns="0" rtlCol="0" anchor="t"/>
+          <a:lstStyle/>
+          <a:p>
+            <a:pPr algn="l" indent="0" marL="0">
+              <a:lnSpc>
+                <a:spcPct val="108000"/>
+              </a:lnSpc>
+              <a:buNone/>
+            </a:pPr>
+            <a:r>
+              <a:rPr lang="en-US" sz="1250" dirty="0">
+                <a:solidFill>
+                  <a:srgbClr val="33444F"/>
+                </a:solidFill>
+                <a:latin typeface="Calibri" pitchFamily="34" charset="0"/>
+                <a:ea typeface="Calibri" pitchFamily="34" charset="-122"/>
+                <a:cs typeface="Calibri" pitchFamily="34" charset="-120"/>
+              </a:rPr>
+              <a:t>Non-treponemal titers fall with successful treatment; treponemal tests usually remain reactive for life.</a:t>
+            </a:r>
+            <a:endParaRPr lang="en-US" sz="1250" dirty="0"/>
+          </a:p>
+        </p:txBody>
+      </p:sp>
+      <p:sp>
+        <p:nvSpPr>
+          <p:cNvPr id="9" name="Text 7"/>
+          <p:cNvSpPr/>
+          <p:nvPr/>
+        </p:nvSpPr>
+        <p:spPr>
+          <a:xfrm>
+            <a:off x="566928" y="6473952"/>
+            <a:ext cx="7772400" cy="274320"/>
+          </a:xfrm>
+          <a:prstGeom prst="rect">
+            <a:avLst/>
+          </a:prstGeom>
+          <a:noFill/>
+          <a:ln/>
+        </p:spPr>
+        <p:txBody>
+          <a:bodyPr wrap="square" lIns="0" tIns="0" rIns="0" bIns="0" rtlCol="0" anchor="ctr"/>
+          <a:lstStyle/>
+          <a:p>
+            <a:pPr algn="l" indent="0" marL="0">
+              <a:buNone/>
+            </a:pPr>
+            <a:r>
+              <a:rPr lang="en-US" sz="850" dirty="0">
+                <a:solidFill>
+                  <a:srgbClr val="9AA8B4"/>
+                </a:solidFill>
+                <a:latin typeface="Calibri" pitchFamily="34" charset="0"/>
+                <a:ea typeface="Calibri" pitchFamily="34" charset="-122"/>
+                <a:cs typeface="Calibri" pitchFamily="34" charset="-120"/>
+              </a:rPr>
+              <a:t>Makassed General Hospital  ·  Department of Laboratory Medicine</a:t>
+            </a:r>
+            <a:endParaRPr lang="en-US" sz="850" dirty="0"/>
+          </a:p>
+        </p:txBody>
+      </p:sp>
+      <p:sp>
+        <p:nvSpPr>
+          <p:cNvPr id="10" name="Text 8"/>
+          <p:cNvSpPr/>
+          <p:nvPr/>
+        </p:nvSpPr>
+        <p:spPr>
+          <a:xfrm>
+            <a:off x="9814255" y="6473952"/>
+            <a:ext cx="1828800" cy="274320"/>
+          </a:xfrm>
+          <a:prstGeom prst="rect">
+            <a:avLst/>
+          </a:prstGeom>
+          <a:noFill/>
+          <a:ln/>
+        </p:spPr>
+        <p:txBody>
+          <a:bodyPr wrap="square" lIns="0" tIns="0" rIns="0" bIns="0" rtlCol="0" anchor="ctr"/>
+          <a:lstStyle/>
+          <a:p>
+            <a:pPr algn="r" indent="0" marL="0">
+              <a:buNone/>
+            </a:pPr>
+            <a:r>
+              <a:rPr lang="en-US" sz="850" dirty="0">
+                <a:solidFill>
+                  <a:srgbClr val="9AA8B4"/>
+                </a:solidFill>
+                <a:latin typeface="Calibri" pitchFamily="34" charset="0"/>
+                <a:ea typeface="Calibri" pitchFamily="34" charset="-122"/>
+                <a:cs typeface="Calibri" pitchFamily="34" charset="-120"/>
+              </a:rPr>
+              <a:t>CP Lecture Series</a:t>
+            </a:r>
+            <a:pPr algn="r" indent="0" marL="0">
+              <a:buNone/>
+            </a:pPr>
+            <a:r>
+              <a:rPr lang="en-US" sz="850" dirty="0">
+                <a:solidFill>
+                  <a:srgbClr val="DCE4EC"/>
+                </a:solidFill>
+                <a:latin typeface="Calibri" pitchFamily="34" charset="0"/>
+                <a:ea typeface="Calibri" pitchFamily="34" charset="-122"/>
+                <a:cs typeface="Calibri" pitchFamily="34" charset="-120"/>
+              </a:rPr>
+              <a:t>   ·   </a:t>
+            </a:r>
+            <a:pPr algn="r" indent="0" marL="0">
+              <a:buNone/>
+            </a:pPr>
+            <a:r>
+              <a:rPr lang="en-US" sz="850" b="1" dirty="0">
+                <a:solidFill>
+                  <a:srgbClr val="6A1B9A"/>
+                </a:solidFill>
+                <a:latin typeface="Calibri" pitchFamily="34" charset="0"/>
+                <a:ea typeface="Calibri" pitchFamily="34" charset="-122"/>
+                <a:cs typeface="Calibri" pitchFamily="34" charset="-120"/>
+              </a:rPr>
+              <a:t>19</a:t>
+            </a:r>
+            <a:endParaRPr lang="en-US" sz="850" dirty="0"/>
+          </a:p>
+        </p:txBody>
+      </p:sp>
+    </p:spTree>
+  </p:cSld>
+  <p:clrMapOvr>
+    <a:masterClrMapping/>
+  </p:clrMapOvr>
+</p:sld>
+</file>
+
+<file path=ppt/slides/slide26.xml><?xml version="1.0" encoding="utf-8"?>
+<p:sld xmlns:a="http://schemas.openxmlformats.org/drawingml/2006/main" xmlns:p="http://schemas.openxmlformats.org/presentationml/2006/main" xmlns:r="http://schemas.openxmlformats.org/officeDocument/2006/relationships">
+  <p:cSld>
+    <p:spTree>
+      <p:nvGrpSpPr>
+        <p:cNvPr id="1" name=""/>
+        <p:cNvGrpSpPr/>
+        <p:nvPr/>
+      </p:nvGrpSpPr>
+      <p:grpSpPr/>
+      <p:sp>
+        <p:nvSpPr>
+          <p:cNvPr id="2" name="Text 0"/>
+          <p:cNvSpPr/>
+          <p:nvPr/>
+        </p:nvSpPr>
+        <p:spPr>
+          <a:xfrm>
+            <a:off x="566928" y="329184"/>
+            <a:ext cx="10515600" cy="310896"/>
+          </a:xfrm>
+          <a:prstGeom prst="rect">
+            <a:avLst/>
+          </a:prstGeom>
+          <a:noFill/>
+          <a:ln/>
+        </p:spPr>
+        <p:txBody>
+          <a:bodyPr wrap="square" lIns="0" tIns="0" rIns="0" bIns="0" rtlCol="0" anchor="ctr"/>
+          <a:lstStyle/>
+          <a:p>
+            <a:pPr algn="l" indent="0" marL="0">
+              <a:buNone/>
+            </a:pPr>
+            <a:r>
+              <a:rPr lang="en-US" sz="1100" b="1" spc="150" kern="0" dirty="0">
+                <a:solidFill>
+                  <a:srgbClr val="6A1B9A"/>
+                </a:solidFill>
+                <a:latin typeface="Calibri" pitchFamily="34" charset="0"/>
+                <a:ea typeface="Calibri" pitchFamily="34" charset="-122"/>
+                <a:cs typeface="Calibri" pitchFamily="34" charset="-120"/>
+              </a:rPr>
+              <a:t>IMMUNOLOGY &amp; SEROLOGY   ·   BOARD REVIEW  ·  Q3</a:t>
+            </a:r>
+            <a:endParaRPr lang="en-US" sz="1100" dirty="0"/>
+          </a:p>
+        </p:txBody>
+      </p:sp>
+      <p:sp>
+        <p:nvSpPr>
+          <p:cNvPr id="3" name="Text 1"/>
+          <p:cNvSpPr/>
+          <p:nvPr/>
+        </p:nvSpPr>
+        <p:spPr>
+          <a:xfrm>
+            <a:off x="566928" y="713232"/>
+            <a:ext cx="11064240" cy="749808"/>
+          </a:xfrm>
+          <a:prstGeom prst="rect">
+            <a:avLst/>
+          </a:prstGeom>
+          <a:noFill/>
+          <a:ln/>
+        </p:spPr>
+        <p:txBody>
+          <a:bodyPr wrap="square" lIns="0" tIns="0" rIns="0" bIns="0" rtlCol="0" anchor="ctr"/>
+          <a:lstStyle/>
+          <a:p>
+            <a:pPr algn="l" indent="0" marL="0">
+              <a:buNone/>
+            </a:pPr>
+            <a:r>
+              <a:rPr lang="en-US" sz="2600" b="1" dirty="0">
+                <a:solidFill>
+                  <a:srgbClr val="0E3A5F"/>
+                </a:solidFill>
+                <a:latin typeface="Calibri" pitchFamily="34" charset="0"/>
+                <a:ea typeface="Calibri" pitchFamily="34" charset="-122"/>
+                <a:cs typeface="Calibri" pitchFamily="34" charset="-120"/>
+              </a:rPr>
+              <a:t>Board-Style Review</a:t>
+            </a:r>
+            <a:endParaRPr lang="en-US" sz="2600" dirty="0"/>
+          </a:p>
+        </p:txBody>
+      </p:sp>
+      <p:sp>
+        <p:nvSpPr>
+          <p:cNvPr id="4" name="Text 2"/>
+          <p:cNvSpPr/>
+          <p:nvPr/>
+        </p:nvSpPr>
+        <p:spPr>
+          <a:xfrm>
+            <a:off x="566928" y="1417320"/>
+            <a:ext cx="11057839" cy="914400"/>
+          </a:xfrm>
+          <a:prstGeom prst="rect">
+            <a:avLst/>
+          </a:prstGeom>
+          <a:noFill/>
+          <a:ln/>
+        </p:spPr>
+        <p:txBody>
+          <a:bodyPr wrap="square" lIns="0" tIns="0" rIns="0" bIns="0" rtlCol="0" anchor="t"/>
+          <a:lstStyle/>
+          <a:p>
+            <a:pPr algn="l" indent="0" marL="0">
+              <a:lnSpc>
+                <a:spcPct val="105000"/>
+              </a:lnSpc>
+              <a:buNone/>
+            </a:pPr>
+            <a:r>
+              <a:rPr lang="en-US" sz="1450" b="1" dirty="0">
+                <a:solidFill>
+                  <a:srgbClr val="1B2A38"/>
+                </a:solidFill>
+                <a:latin typeface="Calibri" pitchFamily="34" charset="0"/>
+                <a:ea typeface="Calibri" pitchFamily="34" charset="-122"/>
+                <a:cs typeface="Calibri" pitchFamily="34" charset="-120"/>
+              </a:rPr>
+              <a:t>In the standard HIV algorithm, a reactive Ag/Ab screen is followed by:</a:t>
+            </a:r>
+            <a:endParaRPr lang="en-US" sz="1450" dirty="0"/>
+          </a:p>
+        </p:txBody>
+      </p:sp>
+      <p:sp>
+        <p:nvSpPr>
+          <p:cNvPr id="5" name="Text 3"/>
+          <p:cNvSpPr/>
+          <p:nvPr/>
+        </p:nvSpPr>
+        <p:spPr>
+          <a:xfrm>
+            <a:off x="658368" y="2395728"/>
+            <a:ext cx="6192390" cy="3017520"/>
+          </a:xfrm>
+          <a:prstGeom prst="rect">
+            <a:avLst/>
+          </a:prstGeom>
+          <a:noFill/>
+          <a:ln/>
+        </p:spPr>
+        <p:txBody>
+          <a:bodyPr wrap="square" lIns="0" tIns="0" rIns="0" bIns="0" rtlCol="0" anchor="t"/>
+          <a:lstStyle/>
+          <a:p>
+            <a:pPr algn="l" indent="0" marL="0">
+              <a:spcAft>
+                <a:spcPts val="600"/>
+              </a:spcAft>
+              <a:buNone/>
+            </a:pPr>
+            <a:r>
+              <a:rPr lang="en-US" sz="1350" dirty="0">
+                <a:solidFill>
+                  <a:srgbClr val="33444F"/>
+                </a:solidFill>
+                <a:latin typeface="Calibri" pitchFamily="34" charset="0"/>
+                <a:ea typeface="Calibri" pitchFamily="34" charset="-122"/>
+                <a:cs typeface="Calibri" pitchFamily="34" charset="-120"/>
+              </a:rPr>
+              <a:t>A. Repeat the same screen</a:t>
+            </a:r>
+            <a:endParaRPr lang="en-US" sz="1350" dirty="0"/>
+          </a:p>
+          <a:p>
+            <a:pPr algn="l" indent="0" marL="0">
+              <a:spcAft>
+                <a:spcPts val="600"/>
+              </a:spcAft>
+              <a:buNone/>
+            </a:pPr>
+            <a:r>
+              <a:rPr lang="en-US" sz="1350" b="1" dirty="0">
+                <a:solidFill>
+                  <a:srgbClr val="4A1269"/>
+                </a:solidFill>
+                <a:latin typeface="Calibri" pitchFamily="34" charset="0"/>
+                <a:ea typeface="Calibri" pitchFamily="34" charset="-122"/>
+                <a:cs typeface="Calibri" pitchFamily="34" charset="-120"/>
+              </a:rPr>
+              <a:t>B. HIV-1/2 antibody differentiation assay</a:t>
+            </a:r>
+            <a:endParaRPr lang="en-US" sz="1350" dirty="0"/>
+          </a:p>
+          <a:p>
+            <a:pPr algn="l" indent="0" marL="0">
+              <a:spcAft>
+                <a:spcPts val="600"/>
+              </a:spcAft>
+              <a:buNone/>
+            </a:pPr>
+            <a:r>
+              <a:rPr lang="en-US" sz="1350" dirty="0">
+                <a:solidFill>
+                  <a:srgbClr val="33444F"/>
+                </a:solidFill>
+                <a:latin typeface="Calibri" pitchFamily="34" charset="0"/>
+                <a:ea typeface="Calibri" pitchFamily="34" charset="-122"/>
+                <a:cs typeface="Calibri" pitchFamily="34" charset="-120"/>
+              </a:rPr>
+              <a:t>C. CD4 count</a:t>
+            </a:r>
+            <a:endParaRPr lang="en-US" sz="1350" dirty="0"/>
+          </a:p>
+          <a:p>
+            <a:pPr algn="l" indent="0" marL="0">
+              <a:spcAft>
+                <a:spcPts val="600"/>
+              </a:spcAft>
+              <a:buNone/>
+            </a:pPr>
+            <a:r>
+              <a:rPr lang="en-US" sz="1350" dirty="0">
+                <a:solidFill>
+                  <a:srgbClr val="33444F"/>
+                </a:solidFill>
+                <a:latin typeface="Calibri" pitchFamily="34" charset="0"/>
+                <a:ea typeface="Calibri" pitchFamily="34" charset="-122"/>
+                <a:cs typeface="Calibri" pitchFamily="34" charset="-120"/>
+              </a:rPr>
+              <a:t>D. Western blot only</a:t>
+            </a:r>
+            <a:endParaRPr lang="en-US" sz="1350" dirty="0"/>
+          </a:p>
+          <a:p>
+            <a:pPr algn="l" indent="0" marL="0">
+              <a:spcAft>
+                <a:spcPts val="600"/>
+              </a:spcAft>
+              <a:buNone/>
+            </a:pPr>
+            <a:r>
+              <a:rPr lang="en-US" sz="1350" dirty="0">
+                <a:solidFill>
+                  <a:srgbClr val="33444F"/>
+                </a:solidFill>
+                <a:latin typeface="Calibri" pitchFamily="34" charset="0"/>
+                <a:ea typeface="Calibri" pitchFamily="34" charset="-122"/>
+                <a:cs typeface="Calibri" pitchFamily="34" charset="-120"/>
+              </a:rPr>
+              <a:t>E. Viral culture</a:t>
+            </a:r>
+            <a:endParaRPr lang="en-US" sz="1350" dirty="0"/>
+          </a:p>
+        </p:txBody>
+      </p:sp>
+      <p:sp>
+        <p:nvSpPr>
+          <p:cNvPr id="6" name="Shape 4"/>
+          <p:cNvSpPr/>
+          <p:nvPr/>
+        </p:nvSpPr>
+        <p:spPr>
+          <a:xfrm>
+            <a:off x="7201632" y="2395728"/>
+            <a:ext cx="4423136" cy="3246120"/>
+          </a:xfrm>
+          <a:prstGeom prst="roundRect">
+            <a:avLst>
+              <a:gd name="adj" fmla="val 2535"/>
+            </a:avLst>
+          </a:prstGeom>
+          <a:solidFill>
+            <a:srgbClr val="F1E8F7"/>
+          </a:solidFill>
+          <a:ln/>
+          <a:effectLst>
+            <a:outerShdw sx="100000" sy="100000" kx="0" ky="0" algn="bl" rotWithShape="0" blurRad="88900" dist="25400" dir="5400000">
+              <a:srgbClr val="22303C">
+                <a:alpha val="12000"/>
+              </a:srgbClr>
+            </a:outerShdw>
+          </a:effectLst>
+        </p:spPr>
+        <p:txBody>
+          <a:bodyPr/>
+          <a:p/>
+        </p:txBody>
+      </p:sp>
+      <p:sp>
+        <p:nvSpPr>
+          <p:cNvPr id="7" name="Text 5"/>
+          <p:cNvSpPr/>
+          <p:nvPr/>
+        </p:nvSpPr>
+        <p:spPr>
+          <a:xfrm>
+            <a:off x="7439376" y="2578608"/>
+            <a:ext cx="3965936" cy="457200"/>
+          </a:xfrm>
+          <a:prstGeom prst="rect">
+            <a:avLst/>
+          </a:prstGeom>
+          <a:noFill/>
+          <a:ln/>
+        </p:spPr>
+        <p:txBody>
+          <a:bodyPr wrap="square" lIns="0" tIns="0" rIns="0" bIns="0" rtlCol="0" anchor="ctr"/>
+          <a:lstStyle/>
+          <a:p>
+            <a:pPr indent="0" marL="0">
+              <a:buNone/>
+            </a:pPr>
+            <a:r>
+              <a:rPr lang="en-US" sz="1500" b="1" dirty="0">
+                <a:solidFill>
+                  <a:srgbClr val="6A1B9A"/>
+                </a:solidFill>
+                <a:latin typeface="Calibri" pitchFamily="34" charset="0"/>
+                <a:ea typeface="Calibri" pitchFamily="34" charset="-122"/>
+                <a:cs typeface="Calibri" pitchFamily="34" charset="-120"/>
+              </a:rPr>
+              <a:t>ANSWER  </a:t>
+            </a:r>
+            <a:pPr indent="0" marL="0">
+              <a:buNone/>
+            </a:pPr>
+            <a:r>
+              <a:rPr lang="en-US" sz="1500" b="1" dirty="0">
+                <a:solidFill>
+                  <a:srgbClr val="1B2A38"/>
+                </a:solidFill>
+                <a:latin typeface="Calibri" pitchFamily="34" charset="0"/>
+                <a:ea typeface="Calibri" pitchFamily="34" charset="-122"/>
+                <a:cs typeface="Calibri" pitchFamily="34" charset="-120"/>
+              </a:rPr>
+              <a:t>B — HIV-1/2 differentiation assay</a:t>
+            </a:r>
+            <a:endParaRPr lang="en-US" sz="1500" dirty="0"/>
+          </a:p>
+        </p:txBody>
+      </p:sp>
+      <p:sp>
+        <p:nvSpPr>
+          <p:cNvPr id="8" name="Text 6"/>
+          <p:cNvSpPr/>
+          <p:nvPr/>
+        </p:nvSpPr>
+        <p:spPr>
+          <a:xfrm>
+            <a:off x="7439376" y="3127248"/>
+            <a:ext cx="3947648" cy="2377440"/>
+          </a:xfrm>
+          <a:prstGeom prst="rect">
+            <a:avLst/>
+          </a:prstGeom>
+          <a:noFill/>
+          <a:ln/>
+        </p:spPr>
+        <p:txBody>
+          <a:bodyPr wrap="square" lIns="0" tIns="0" rIns="0" bIns="0" rtlCol="0" anchor="t"/>
+          <a:lstStyle/>
+          <a:p>
+            <a:pPr algn="l" indent="0" marL="0">
+              <a:lnSpc>
+                <a:spcPct val="108000"/>
+              </a:lnSpc>
+              <a:buNone/>
+            </a:pPr>
+            <a:r>
+              <a:rPr lang="en-US" sz="1250" dirty="0">
+                <a:solidFill>
+                  <a:srgbClr val="33444F"/>
+                </a:solidFill>
+                <a:latin typeface="Calibri" pitchFamily="34" charset="0"/>
+                <a:ea typeface="Calibri" pitchFamily="34" charset="-122"/>
+                <a:cs typeface="Calibri" pitchFamily="34" charset="-120"/>
+              </a:rPr>
+              <a:t>A reactive 4th-generation screen reflexes to an antibody differentiation assay; discordance prompts HIV-1 RNA.</a:t>
+            </a:r>
+            <a:endParaRPr lang="en-US" sz="1250" dirty="0"/>
+          </a:p>
+        </p:txBody>
+      </p:sp>
+      <p:sp>
+        <p:nvSpPr>
+          <p:cNvPr id="9" name="Text 7"/>
+          <p:cNvSpPr/>
+          <p:nvPr/>
+        </p:nvSpPr>
+        <p:spPr>
+          <a:xfrm>
+            <a:off x="566928" y="6473952"/>
+            <a:ext cx="7772400" cy="274320"/>
+          </a:xfrm>
+          <a:prstGeom prst="rect">
+            <a:avLst/>
+          </a:prstGeom>
+          <a:noFill/>
+          <a:ln/>
+        </p:spPr>
+        <p:txBody>
+          <a:bodyPr wrap="square" lIns="0" tIns="0" rIns="0" bIns="0" rtlCol="0" anchor="ctr"/>
+          <a:lstStyle/>
+          <a:p>
+            <a:pPr algn="l" indent="0" marL="0">
+              <a:buNone/>
+            </a:pPr>
+            <a:r>
+              <a:rPr lang="en-US" sz="850" dirty="0">
+                <a:solidFill>
+                  <a:srgbClr val="9AA8B4"/>
+                </a:solidFill>
+                <a:latin typeface="Calibri" pitchFamily="34" charset="0"/>
+                <a:ea typeface="Calibri" pitchFamily="34" charset="-122"/>
+                <a:cs typeface="Calibri" pitchFamily="34" charset="-120"/>
+              </a:rPr>
+              <a:t>Makassed General Hospital  ·  Department of Laboratory Medicine</a:t>
+            </a:r>
+            <a:endParaRPr lang="en-US" sz="850" dirty="0"/>
+          </a:p>
+        </p:txBody>
+      </p:sp>
+      <p:sp>
+        <p:nvSpPr>
+          <p:cNvPr id="10" name="Text 8"/>
+          <p:cNvSpPr/>
+          <p:nvPr/>
+        </p:nvSpPr>
+        <p:spPr>
+          <a:xfrm>
+            <a:off x="9814255" y="6473952"/>
+            <a:ext cx="1828800" cy="274320"/>
+          </a:xfrm>
+          <a:prstGeom prst="rect">
+            <a:avLst/>
+          </a:prstGeom>
+          <a:noFill/>
+          <a:ln/>
+        </p:spPr>
+        <p:txBody>
+          <a:bodyPr wrap="square" lIns="0" tIns="0" rIns="0" bIns="0" rtlCol="0" anchor="ctr"/>
+          <a:lstStyle/>
+          <a:p>
+            <a:pPr algn="r" indent="0" marL="0">
+              <a:buNone/>
+            </a:pPr>
+            <a:r>
+              <a:rPr lang="en-US" sz="850" dirty="0">
+                <a:solidFill>
+                  <a:srgbClr val="9AA8B4"/>
+                </a:solidFill>
+                <a:latin typeface="Calibri" pitchFamily="34" charset="0"/>
+                <a:ea typeface="Calibri" pitchFamily="34" charset="-122"/>
+                <a:cs typeface="Calibri" pitchFamily="34" charset="-120"/>
+              </a:rPr>
+              <a:t>CP Lecture Series</a:t>
+            </a:r>
+            <a:pPr algn="r" indent="0" marL="0">
+              <a:buNone/>
+            </a:pPr>
+            <a:r>
+              <a:rPr lang="en-US" sz="850" dirty="0">
+                <a:solidFill>
+                  <a:srgbClr val="DCE4EC"/>
+                </a:solidFill>
+                <a:latin typeface="Calibri" pitchFamily="34" charset="0"/>
+                <a:ea typeface="Calibri" pitchFamily="34" charset="-122"/>
+                <a:cs typeface="Calibri" pitchFamily="34" charset="-120"/>
+              </a:rPr>
+              <a:t>   ·   </a:t>
+            </a:r>
+            <a:pPr algn="r" indent="0" marL="0">
+              <a:buNone/>
+            </a:pPr>
+            <a:r>
+              <a:rPr lang="en-US" sz="850" b="1" dirty="0">
+                <a:solidFill>
+                  <a:srgbClr val="6A1B9A"/>
+                </a:solidFill>
+                <a:latin typeface="Calibri" pitchFamily="34" charset="0"/>
+                <a:ea typeface="Calibri" pitchFamily="34" charset="-122"/>
+                <a:cs typeface="Calibri" pitchFamily="34" charset="-120"/>
+              </a:rPr>
+              <a:t>18</a:t>
+            </a:r>
+            <a:endParaRPr lang="en-US" sz="850" dirty="0"/>
+          </a:p>
+        </p:txBody>
+      </p:sp>
+    </p:spTree>
+  </p:cSld>
+  <p:clrMapOvr>
+    <a:masterClrMapping/>
+  </p:clrMapOvr>
+</p:sld>
+</file>
+
+<file path=ppt/slides/slide27.xml><?xml version="1.0" encoding="utf-8"?>
+<p:sld xmlns:a="http://schemas.openxmlformats.org/drawingml/2006/main" xmlns:p="http://schemas.openxmlformats.org/presentationml/2006/main" xmlns:r="http://schemas.openxmlformats.org/officeDocument/2006/relationships">
+  <p:cSld>
+    <p:spTree>
+      <p:nvGrpSpPr>
+        <p:cNvPr id="1" name=""/>
+        <p:cNvGrpSpPr/>
+        <p:nvPr/>
+      </p:nvGrpSpPr>
+      <p:grpSpPr/>
+      <p:sp>
+        <p:nvSpPr>
+          <p:cNvPr id="2" name="Text 0"/>
+          <p:cNvSpPr/>
+          <p:nvPr/>
+        </p:nvSpPr>
+        <p:spPr>
+          <a:xfrm>
+            <a:off x="566928" y="329184"/>
+            <a:ext cx="10515600" cy="310896"/>
+          </a:xfrm>
+          <a:prstGeom prst="rect">
+            <a:avLst/>
+          </a:prstGeom>
+          <a:noFill/>
+          <a:ln/>
+        </p:spPr>
+        <p:txBody>
+          <a:bodyPr wrap="square" lIns="0" tIns="0" rIns="0" bIns="0" rtlCol="0" anchor="ctr"/>
+          <a:lstStyle/>
+          <a:p>
+            <a:pPr algn="l" indent="0" marL="0">
+              <a:buNone/>
+            </a:pPr>
+            <a:r>
+              <a:rPr lang="en-US" sz="1100" b="1" spc="150" kern="0" dirty="0">
+                <a:solidFill>
+                  <a:srgbClr val="6A1B9A"/>
+                </a:solidFill>
+                <a:latin typeface="Calibri" pitchFamily="34" charset="0"/>
+                <a:ea typeface="Calibri" pitchFamily="34" charset="-122"/>
+                <a:cs typeface="Calibri" pitchFamily="34" charset="-120"/>
+              </a:rPr>
+              <a:t>IMMUNOLOGY &amp; SEROLOGY   ·   BOARD REVIEW  ·  Q2</a:t>
+            </a:r>
+            <a:endParaRPr lang="en-US" sz="1100" dirty="0"/>
+          </a:p>
+        </p:txBody>
+      </p:sp>
+      <p:sp>
+        <p:nvSpPr>
+          <p:cNvPr id="3" name="Text 1"/>
+          <p:cNvSpPr/>
+          <p:nvPr/>
+        </p:nvSpPr>
+        <p:spPr>
+          <a:xfrm>
+            <a:off x="566928" y="713232"/>
+            <a:ext cx="11064240" cy="749808"/>
+          </a:xfrm>
+          <a:prstGeom prst="rect">
+            <a:avLst/>
+          </a:prstGeom>
+          <a:noFill/>
+          <a:ln/>
+        </p:spPr>
+        <p:txBody>
+          <a:bodyPr wrap="square" lIns="0" tIns="0" rIns="0" bIns="0" rtlCol="0" anchor="ctr"/>
+          <a:lstStyle/>
+          <a:p>
+            <a:pPr algn="l" indent="0" marL="0">
+              <a:buNone/>
+            </a:pPr>
+            <a:r>
+              <a:rPr lang="en-US" sz="2600" b="1" dirty="0">
+                <a:solidFill>
+                  <a:srgbClr val="0E3A5F"/>
+                </a:solidFill>
+                <a:latin typeface="Calibri" pitchFamily="34" charset="0"/>
+                <a:ea typeface="Calibri" pitchFamily="34" charset="-122"/>
+                <a:cs typeface="Calibri" pitchFamily="34" charset="-120"/>
+              </a:rPr>
+              <a:t>Board-Style Review</a:t>
+            </a:r>
+            <a:endParaRPr lang="en-US" sz="2600" dirty="0"/>
+          </a:p>
+        </p:txBody>
+      </p:sp>
+      <p:sp>
+        <p:nvSpPr>
+          <p:cNvPr id="4" name="Text 2"/>
+          <p:cNvSpPr/>
+          <p:nvPr/>
+        </p:nvSpPr>
+        <p:spPr>
+          <a:xfrm>
+            <a:off x="566928" y="1417320"/>
+            <a:ext cx="11057839" cy="914400"/>
+          </a:xfrm>
+          <a:prstGeom prst="rect">
+            <a:avLst/>
+          </a:prstGeom>
+          <a:noFill/>
+          <a:ln/>
+        </p:spPr>
+        <p:txBody>
+          <a:bodyPr wrap="square" lIns="0" tIns="0" rIns="0" bIns="0" rtlCol="0" anchor="t"/>
+          <a:lstStyle/>
+          <a:p>
+            <a:pPr algn="l" indent="0" marL="0">
+              <a:lnSpc>
+                <a:spcPct val="105000"/>
+              </a:lnSpc>
+              <a:buNone/>
+            </a:pPr>
+            <a:r>
+              <a:rPr lang="en-US" sz="1450" b="1" dirty="0">
+                <a:solidFill>
+                  <a:srgbClr val="1B2A38"/>
+                </a:solidFill>
+                <a:latin typeface="Calibri" pitchFamily="34" charset="0"/>
+                <a:ea typeface="Calibri" pitchFamily="34" charset="-122"/>
+                <a:cs typeface="Calibri" pitchFamily="34" charset="-120"/>
+              </a:rPr>
+              <a:t>During the window period of an infection, the best test is often:</a:t>
+            </a:r>
+            <a:endParaRPr lang="en-US" sz="1450" dirty="0"/>
+          </a:p>
+        </p:txBody>
+      </p:sp>
+      <p:sp>
+        <p:nvSpPr>
+          <p:cNvPr id="5" name="Text 3"/>
+          <p:cNvSpPr/>
+          <p:nvPr/>
+        </p:nvSpPr>
+        <p:spPr>
+          <a:xfrm>
+            <a:off x="658368" y="2395728"/>
+            <a:ext cx="6192390" cy="3017520"/>
+          </a:xfrm>
+          <a:prstGeom prst="rect">
+            <a:avLst/>
+          </a:prstGeom>
+          <a:noFill/>
+          <a:ln/>
+        </p:spPr>
+        <p:txBody>
+          <a:bodyPr wrap="square" lIns="0" tIns="0" rIns="0" bIns="0" rtlCol="0" anchor="t"/>
+          <a:lstStyle/>
+          <a:p>
+            <a:pPr algn="l" indent="0" marL="0">
+              <a:spcAft>
+                <a:spcPts val="600"/>
+              </a:spcAft>
+              <a:buNone/>
+            </a:pPr>
+            <a:r>
+              <a:rPr lang="en-US" sz="1350" dirty="0">
+                <a:solidFill>
+                  <a:srgbClr val="33444F"/>
+                </a:solidFill>
+                <a:latin typeface="Calibri" pitchFamily="34" charset="0"/>
+                <a:ea typeface="Calibri" pitchFamily="34" charset="-122"/>
+                <a:cs typeface="Calibri" pitchFamily="34" charset="-120"/>
+              </a:rPr>
+              <a:t>A. IgG antibody</a:t>
+            </a:r>
+            <a:endParaRPr lang="en-US" sz="1350" dirty="0"/>
+          </a:p>
+          <a:p>
+            <a:pPr algn="l" indent="0" marL="0">
+              <a:spcAft>
+                <a:spcPts val="600"/>
+              </a:spcAft>
+              <a:buNone/>
+            </a:pPr>
+            <a:r>
+              <a:rPr lang="en-US" sz="1350" dirty="0">
+                <a:solidFill>
+                  <a:srgbClr val="33444F"/>
+                </a:solidFill>
+                <a:latin typeface="Calibri" pitchFamily="34" charset="0"/>
+                <a:ea typeface="Calibri" pitchFamily="34" charset="-122"/>
+                <a:cs typeface="Calibri" pitchFamily="34" charset="-120"/>
+              </a:rPr>
+              <a:t>B. IgM antibody only</a:t>
+            </a:r>
+            <a:endParaRPr lang="en-US" sz="1350" dirty="0"/>
+          </a:p>
+          <a:p>
+            <a:pPr algn="l" indent="0" marL="0">
+              <a:spcAft>
+                <a:spcPts val="600"/>
+              </a:spcAft>
+              <a:buNone/>
+            </a:pPr>
+            <a:r>
+              <a:rPr lang="en-US" sz="1350" b="1" dirty="0">
+                <a:solidFill>
+                  <a:srgbClr val="4A1269"/>
+                </a:solidFill>
+                <a:latin typeface="Calibri" pitchFamily="34" charset="0"/>
+                <a:ea typeface="Calibri" pitchFamily="34" charset="-122"/>
+                <a:cs typeface="Calibri" pitchFamily="34" charset="-120"/>
+              </a:rPr>
+              <a:t>C. Antigen or nucleic acid detection</a:t>
+            </a:r>
+            <a:endParaRPr lang="en-US" sz="1350" dirty="0"/>
+          </a:p>
+          <a:p>
+            <a:pPr algn="l" indent="0" marL="0">
+              <a:spcAft>
+                <a:spcPts val="600"/>
+              </a:spcAft>
+              <a:buNone/>
+            </a:pPr>
+            <a:r>
+              <a:rPr lang="en-US" sz="1350" dirty="0">
+                <a:solidFill>
+                  <a:srgbClr val="33444F"/>
+                </a:solidFill>
+                <a:latin typeface="Calibri" pitchFamily="34" charset="0"/>
+                <a:ea typeface="Calibri" pitchFamily="34" charset="-122"/>
+                <a:cs typeface="Calibri" pitchFamily="34" charset="-120"/>
+              </a:rPr>
+              <a:t>D. Avidity testing</a:t>
+            </a:r>
+            <a:endParaRPr lang="en-US" sz="1350" dirty="0"/>
+          </a:p>
+          <a:p>
+            <a:pPr algn="l" indent="0" marL="0">
+              <a:spcAft>
+                <a:spcPts val="600"/>
+              </a:spcAft>
+              <a:buNone/>
+            </a:pPr>
+            <a:r>
+              <a:rPr lang="en-US" sz="1350" dirty="0">
+                <a:solidFill>
+                  <a:srgbClr val="33444F"/>
+                </a:solidFill>
+                <a:latin typeface="Calibri" pitchFamily="34" charset="0"/>
+                <a:ea typeface="Calibri" pitchFamily="34" charset="-122"/>
+                <a:cs typeface="Calibri" pitchFamily="34" charset="-120"/>
+              </a:rPr>
+              <a:t>E. No testing</a:t>
+            </a:r>
+            <a:endParaRPr lang="en-US" sz="1350" dirty="0"/>
+          </a:p>
+        </p:txBody>
+      </p:sp>
+      <p:sp>
+        <p:nvSpPr>
+          <p:cNvPr id="6" name="Shape 4"/>
+          <p:cNvSpPr/>
+          <p:nvPr/>
+        </p:nvSpPr>
+        <p:spPr>
+          <a:xfrm>
+            <a:off x="7201632" y="2395728"/>
+            <a:ext cx="4423136" cy="3246120"/>
+          </a:xfrm>
+          <a:prstGeom prst="roundRect">
+            <a:avLst>
+              <a:gd name="adj" fmla="val 2535"/>
+            </a:avLst>
+          </a:prstGeom>
+          <a:solidFill>
+            <a:srgbClr val="F1E8F7"/>
+          </a:solidFill>
+          <a:ln/>
+          <a:effectLst>
+            <a:outerShdw sx="100000" sy="100000" kx="0" ky="0" algn="bl" rotWithShape="0" blurRad="88900" dist="25400" dir="5400000">
+              <a:srgbClr val="22303C">
+                <a:alpha val="12000"/>
+              </a:srgbClr>
+            </a:outerShdw>
+          </a:effectLst>
+        </p:spPr>
+        <p:txBody>
+          <a:bodyPr/>
+          <a:p/>
+        </p:txBody>
+      </p:sp>
+      <p:sp>
+        <p:nvSpPr>
+          <p:cNvPr id="7" name="Text 5"/>
+          <p:cNvSpPr/>
+          <p:nvPr/>
+        </p:nvSpPr>
+        <p:spPr>
+          <a:xfrm>
+            <a:off x="7439376" y="2578608"/>
+            <a:ext cx="3965936" cy="457200"/>
+          </a:xfrm>
+          <a:prstGeom prst="rect">
+            <a:avLst/>
+          </a:prstGeom>
+          <a:noFill/>
+          <a:ln/>
+        </p:spPr>
+        <p:txBody>
+          <a:bodyPr wrap="square" lIns="0" tIns="0" rIns="0" bIns="0" rtlCol="0" anchor="ctr"/>
+          <a:lstStyle/>
+          <a:p>
+            <a:pPr indent="0" marL="0">
+              <a:buNone/>
+            </a:pPr>
+            <a:r>
+              <a:rPr lang="en-US" sz="1500" b="1" dirty="0">
+                <a:solidFill>
+                  <a:srgbClr val="6A1B9A"/>
+                </a:solidFill>
+                <a:latin typeface="Calibri" pitchFamily="34" charset="0"/>
+                <a:ea typeface="Calibri" pitchFamily="34" charset="-122"/>
+                <a:cs typeface="Calibri" pitchFamily="34" charset="-120"/>
+              </a:rPr>
+              <a:t>ANSWER  </a:t>
+            </a:r>
+            <a:pPr indent="0" marL="0">
+              <a:buNone/>
+            </a:pPr>
+            <a:r>
+              <a:rPr lang="en-US" sz="1500" b="1" dirty="0">
+                <a:solidFill>
+                  <a:srgbClr val="1B2A38"/>
+                </a:solidFill>
+                <a:latin typeface="Calibri" pitchFamily="34" charset="0"/>
+                <a:ea typeface="Calibri" pitchFamily="34" charset="-122"/>
+                <a:cs typeface="Calibri" pitchFamily="34" charset="-120"/>
+              </a:rPr>
+              <a:t>C — Antigen or NAAT</a:t>
+            </a:r>
+            <a:endParaRPr lang="en-US" sz="1500" dirty="0"/>
+          </a:p>
+        </p:txBody>
+      </p:sp>
+      <p:sp>
+        <p:nvSpPr>
+          <p:cNvPr id="8" name="Text 6"/>
+          <p:cNvSpPr/>
+          <p:nvPr/>
+        </p:nvSpPr>
+        <p:spPr>
+          <a:xfrm>
+            <a:off x="7439376" y="3127248"/>
+            <a:ext cx="3947648" cy="2377440"/>
+          </a:xfrm>
+          <a:prstGeom prst="rect">
+            <a:avLst/>
+          </a:prstGeom>
+          <a:noFill/>
+          <a:ln/>
+        </p:spPr>
+        <p:txBody>
+          <a:bodyPr wrap="square" lIns="0" tIns="0" rIns="0" bIns="0" rtlCol="0" anchor="t"/>
+          <a:lstStyle/>
+          <a:p>
+            <a:pPr algn="l" indent="0" marL="0">
+              <a:lnSpc>
+                <a:spcPct val="108000"/>
+              </a:lnSpc>
+              <a:buNone/>
+            </a:pPr>
+            <a:r>
+              <a:rPr lang="en-US" sz="1250" dirty="0">
+                <a:solidFill>
+                  <a:srgbClr val="33444F"/>
+                </a:solidFill>
+                <a:latin typeface="Calibri" pitchFamily="34" charset="0"/>
+                <a:ea typeface="Calibri" pitchFamily="34" charset="-122"/>
+                <a:cs typeface="Calibri" pitchFamily="34" charset="-120"/>
+              </a:rPr>
+              <a:t>Antibodies may be undetectable early; antigen and nucleic acid tests detect infection during the window.</a:t>
+            </a:r>
+            <a:endParaRPr lang="en-US" sz="1250" dirty="0"/>
+          </a:p>
+        </p:txBody>
+      </p:sp>
+      <p:sp>
+        <p:nvSpPr>
+          <p:cNvPr id="9" name="Text 7"/>
+          <p:cNvSpPr/>
+          <p:nvPr/>
+        </p:nvSpPr>
+        <p:spPr>
+          <a:xfrm>
+            <a:off x="566928" y="6473952"/>
+            <a:ext cx="7772400" cy="274320"/>
+          </a:xfrm>
+          <a:prstGeom prst="rect">
+            <a:avLst/>
+          </a:prstGeom>
+          <a:noFill/>
+          <a:ln/>
+        </p:spPr>
+        <p:txBody>
+          <a:bodyPr wrap="square" lIns="0" tIns="0" rIns="0" bIns="0" rtlCol="0" anchor="ctr"/>
+          <a:lstStyle/>
+          <a:p>
+            <a:pPr algn="l" indent="0" marL="0">
+              <a:buNone/>
+            </a:pPr>
+            <a:r>
+              <a:rPr lang="en-US" sz="850" dirty="0">
+                <a:solidFill>
+                  <a:srgbClr val="9AA8B4"/>
+                </a:solidFill>
+                <a:latin typeface="Calibri" pitchFamily="34" charset="0"/>
+                <a:ea typeface="Calibri" pitchFamily="34" charset="-122"/>
+                <a:cs typeface="Calibri" pitchFamily="34" charset="-120"/>
+              </a:rPr>
+              <a:t>Makassed General Hospital  ·  Department of Laboratory Medicine</a:t>
+            </a:r>
+            <a:endParaRPr lang="en-US" sz="850" dirty="0"/>
+          </a:p>
+        </p:txBody>
+      </p:sp>
+      <p:sp>
+        <p:nvSpPr>
+          <p:cNvPr id="10" name="Text 8"/>
+          <p:cNvSpPr/>
+          <p:nvPr/>
+        </p:nvSpPr>
+        <p:spPr>
+          <a:xfrm>
+            <a:off x="9814255" y="6473952"/>
+            <a:ext cx="1828800" cy="274320"/>
+          </a:xfrm>
+          <a:prstGeom prst="rect">
+            <a:avLst/>
+          </a:prstGeom>
+          <a:noFill/>
+          <a:ln/>
+        </p:spPr>
+        <p:txBody>
+          <a:bodyPr wrap="square" lIns="0" tIns="0" rIns="0" bIns="0" rtlCol="0" anchor="ctr"/>
+          <a:lstStyle/>
+          <a:p>
+            <a:pPr algn="r" indent="0" marL="0">
+              <a:buNone/>
+            </a:pPr>
+            <a:r>
+              <a:rPr lang="en-US" sz="850" dirty="0">
+                <a:solidFill>
+                  <a:srgbClr val="9AA8B4"/>
+                </a:solidFill>
+                <a:latin typeface="Calibri" pitchFamily="34" charset="0"/>
+                <a:ea typeface="Calibri" pitchFamily="34" charset="-122"/>
+                <a:cs typeface="Calibri" pitchFamily="34" charset="-120"/>
+              </a:rPr>
+              <a:t>CP Lecture Series</a:t>
+            </a:r>
+            <a:pPr algn="r" indent="0" marL="0">
+              <a:buNone/>
+            </a:pPr>
+            <a:r>
+              <a:rPr lang="en-US" sz="850" dirty="0">
+                <a:solidFill>
+                  <a:srgbClr val="DCE4EC"/>
+                </a:solidFill>
+                <a:latin typeface="Calibri" pitchFamily="34" charset="0"/>
+                <a:ea typeface="Calibri" pitchFamily="34" charset="-122"/>
+                <a:cs typeface="Calibri" pitchFamily="34" charset="-120"/>
+              </a:rPr>
+              <a:t>   ·   </a:t>
+            </a:r>
+            <a:pPr algn="r" indent="0" marL="0">
+              <a:buNone/>
+            </a:pPr>
+            <a:r>
+              <a:rPr lang="en-US" sz="850" b="1" dirty="0">
+                <a:solidFill>
+                  <a:srgbClr val="6A1B9A"/>
+                </a:solidFill>
+                <a:latin typeface="Calibri" pitchFamily="34" charset="0"/>
+                <a:ea typeface="Calibri" pitchFamily="34" charset="-122"/>
+                <a:cs typeface="Calibri" pitchFamily="34" charset="-120"/>
+              </a:rPr>
+              <a:t>17</a:t>
+            </a:r>
+            <a:endParaRPr lang="en-US" sz="850" dirty="0"/>
+          </a:p>
+        </p:txBody>
+      </p:sp>
+    </p:spTree>
+  </p:cSld>
+  <p:clrMapOvr>
+    <a:masterClrMapping/>
+  </p:clrMapOvr>
+</p:sld>
+</file>
+
+<file path=ppt/slides/slide28.xml><?xml version="1.0" encoding="utf-8"?>
+<p:sld xmlns:a="http://schemas.openxmlformats.org/drawingml/2006/main" xmlns:p="http://schemas.openxmlformats.org/presentationml/2006/main" xmlns:r="http://schemas.openxmlformats.org/officeDocument/2006/relationships">
+  <p:cSld>
+    <p:spTree>
+      <p:nvGrpSpPr>
+        <p:cNvPr id="1" name=""/>
+        <p:cNvGrpSpPr/>
+        <p:nvPr/>
+      </p:nvGrpSpPr>
+      <p:grpSpPr/>
+      <p:sp>
+        <p:nvSpPr>
+          <p:cNvPr id="2" name="Text 0"/>
+          <p:cNvSpPr/>
+          <p:nvPr/>
+        </p:nvSpPr>
+        <p:spPr>
+          <a:xfrm>
+            <a:off x="566928" y="329184"/>
+            <a:ext cx="10515600" cy="310896"/>
+          </a:xfrm>
+          <a:prstGeom prst="rect">
+            <a:avLst/>
+          </a:prstGeom>
+          <a:noFill/>
+          <a:ln/>
+        </p:spPr>
+        <p:txBody>
+          <a:bodyPr wrap="square" lIns="0" tIns="0" rIns="0" bIns="0" rtlCol="0" anchor="ctr"/>
+          <a:lstStyle/>
+          <a:p>
+            <a:pPr algn="l" indent="0" marL="0">
+              <a:buNone/>
+            </a:pPr>
+            <a:r>
+              <a:rPr lang="en-US" sz="1100" b="1" spc="150" kern="0" dirty="0">
+                <a:solidFill>
+                  <a:srgbClr val="6A1B9A"/>
+                </a:solidFill>
+                <a:latin typeface="Calibri" pitchFamily="34" charset="0"/>
+                <a:ea typeface="Calibri" pitchFamily="34" charset="-122"/>
+                <a:cs typeface="Calibri" pitchFamily="34" charset="-120"/>
+              </a:rPr>
+              <a:t>IMMUNOLOGY &amp; SEROLOGY   ·   BOARD REVIEW  ·  Q1</a:t>
+            </a:r>
+            <a:endParaRPr lang="en-US" sz="1100" dirty="0"/>
+          </a:p>
+        </p:txBody>
+      </p:sp>
+      <p:sp>
+        <p:nvSpPr>
+          <p:cNvPr id="3" name="Text 1"/>
+          <p:cNvSpPr/>
+          <p:nvPr/>
+        </p:nvSpPr>
+        <p:spPr>
+          <a:xfrm>
+            <a:off x="566928" y="713232"/>
+            <a:ext cx="11064240" cy="749808"/>
+          </a:xfrm>
+          <a:prstGeom prst="rect">
+            <a:avLst/>
+          </a:prstGeom>
+          <a:noFill/>
+          <a:ln/>
+        </p:spPr>
+        <p:txBody>
+          <a:bodyPr wrap="square" lIns="0" tIns="0" rIns="0" bIns="0" rtlCol="0" anchor="ctr"/>
+          <a:lstStyle/>
+          <a:p>
+            <a:pPr algn="l" indent="0" marL="0">
+              <a:buNone/>
+            </a:pPr>
+            <a:r>
+              <a:rPr lang="en-US" sz="2600" b="1" dirty="0">
+                <a:solidFill>
+                  <a:srgbClr val="0E3A5F"/>
+                </a:solidFill>
+                <a:latin typeface="Calibri" pitchFamily="34" charset="0"/>
+                <a:ea typeface="Calibri" pitchFamily="34" charset="-122"/>
+                <a:cs typeface="Calibri" pitchFamily="34" charset="-120"/>
+              </a:rPr>
+              <a:t>Board-Style Review</a:t>
+            </a:r>
+            <a:endParaRPr lang="en-US" sz="2600" dirty="0"/>
+          </a:p>
+        </p:txBody>
+      </p:sp>
+      <p:sp>
+        <p:nvSpPr>
+          <p:cNvPr id="4" name="Text 2"/>
+          <p:cNvSpPr/>
+          <p:nvPr/>
+        </p:nvSpPr>
+        <p:spPr>
+          <a:xfrm>
+            <a:off x="566928" y="1417320"/>
+            <a:ext cx="11057839" cy="914400"/>
+          </a:xfrm>
+          <a:prstGeom prst="rect">
+            <a:avLst/>
+          </a:prstGeom>
+          <a:noFill/>
+          <a:ln/>
+        </p:spPr>
+        <p:txBody>
+          <a:bodyPr wrap="square" lIns="0" tIns="0" rIns="0" bIns="0" rtlCol="0" anchor="t"/>
+          <a:lstStyle/>
+          <a:p>
+            <a:pPr algn="l" indent="0" marL="0">
+              <a:lnSpc>
+                <a:spcPct val="105000"/>
+              </a:lnSpc>
+              <a:buNone/>
+            </a:pPr>
+            <a:r>
+              <a:rPr lang="en-US" sz="1450" b="1" dirty="0">
+                <a:solidFill>
+                  <a:srgbClr val="1B2A38"/>
+                </a:solidFill>
+                <a:latin typeface="Calibri" pitchFamily="34" charset="0"/>
+                <a:ea typeface="Calibri" pitchFamily="34" charset="-122"/>
+                <a:cs typeface="Calibri" pitchFamily="34" charset="-120"/>
+              </a:rPr>
+              <a:t>Which marker distinguishes natural hepatitis B infection from vaccination?</a:t>
+            </a:r>
+            <a:endParaRPr lang="en-US" sz="1450" dirty="0"/>
+          </a:p>
+        </p:txBody>
+      </p:sp>
+      <p:sp>
+        <p:nvSpPr>
+          <p:cNvPr id="5" name="Text 3"/>
+          <p:cNvSpPr/>
+          <p:nvPr/>
+        </p:nvSpPr>
+        <p:spPr>
+          <a:xfrm>
+            <a:off x="658368" y="2395728"/>
+            <a:ext cx="6192390" cy="3017520"/>
+          </a:xfrm>
+          <a:prstGeom prst="rect">
+            <a:avLst/>
+          </a:prstGeom>
+          <a:noFill/>
+          <a:ln/>
+        </p:spPr>
+        <p:txBody>
+          <a:bodyPr wrap="square" lIns="0" tIns="0" rIns="0" bIns="0" rtlCol="0" anchor="t"/>
+          <a:lstStyle/>
+          <a:p>
+            <a:pPr algn="l" indent="0" marL="0">
+              <a:spcAft>
+                <a:spcPts val="600"/>
+              </a:spcAft>
+              <a:buNone/>
+            </a:pPr>
+            <a:r>
+              <a:rPr lang="en-US" sz="1350" dirty="0">
+                <a:solidFill>
+                  <a:srgbClr val="33444F"/>
+                </a:solidFill>
+                <a:latin typeface="Calibri" pitchFamily="34" charset="0"/>
+                <a:ea typeface="Calibri" pitchFamily="34" charset="-122"/>
+                <a:cs typeface="Calibri" pitchFamily="34" charset="-120"/>
+              </a:rPr>
+              <a:t>A. HBsAg</a:t>
+            </a:r>
+            <a:endParaRPr lang="en-US" sz="1350" dirty="0"/>
+          </a:p>
+          <a:p>
+            <a:pPr algn="l" indent="0" marL="0">
+              <a:spcAft>
+                <a:spcPts val="600"/>
+              </a:spcAft>
+              <a:buNone/>
+            </a:pPr>
+            <a:r>
+              <a:rPr lang="en-US" sz="1350" dirty="0">
+                <a:solidFill>
+                  <a:srgbClr val="33444F"/>
+                </a:solidFill>
+                <a:latin typeface="Calibri" pitchFamily="34" charset="0"/>
+                <a:ea typeface="Calibri" pitchFamily="34" charset="-122"/>
+                <a:cs typeface="Calibri" pitchFamily="34" charset="-120"/>
+              </a:rPr>
+              <a:t>B. Anti-HBs</a:t>
+            </a:r>
+            <a:endParaRPr lang="en-US" sz="1350" dirty="0"/>
+          </a:p>
+          <a:p>
+            <a:pPr algn="l" indent="0" marL="0">
+              <a:spcAft>
+                <a:spcPts val="600"/>
+              </a:spcAft>
+              <a:buNone/>
+            </a:pPr>
+            <a:r>
+              <a:rPr lang="en-US" sz="1350" b="1" dirty="0">
+                <a:solidFill>
+                  <a:srgbClr val="4A1269"/>
+                </a:solidFill>
+                <a:latin typeface="Calibri" pitchFamily="34" charset="0"/>
+                <a:ea typeface="Calibri" pitchFamily="34" charset="-122"/>
+                <a:cs typeface="Calibri" pitchFamily="34" charset="-120"/>
+              </a:rPr>
+              <a:t>C. Anti-HBc</a:t>
+            </a:r>
+            <a:endParaRPr lang="en-US" sz="1350" dirty="0"/>
+          </a:p>
+          <a:p>
+            <a:pPr algn="l" indent="0" marL="0">
+              <a:spcAft>
+                <a:spcPts val="600"/>
+              </a:spcAft>
+              <a:buNone/>
+            </a:pPr>
+            <a:r>
+              <a:rPr lang="en-US" sz="1350" dirty="0">
+                <a:solidFill>
+                  <a:srgbClr val="33444F"/>
+                </a:solidFill>
+                <a:latin typeface="Calibri" pitchFamily="34" charset="0"/>
+                <a:ea typeface="Calibri" pitchFamily="34" charset="-122"/>
+                <a:cs typeface="Calibri" pitchFamily="34" charset="-120"/>
+              </a:rPr>
+              <a:t>D. HBeAg</a:t>
+            </a:r>
+            <a:endParaRPr lang="en-US" sz="1350" dirty="0"/>
+          </a:p>
+          <a:p>
+            <a:pPr algn="l" indent="0" marL="0">
+              <a:spcAft>
+                <a:spcPts val="600"/>
+              </a:spcAft>
+              <a:buNone/>
+            </a:pPr>
+            <a:r>
+              <a:rPr lang="en-US" sz="1350" dirty="0">
+                <a:solidFill>
+                  <a:srgbClr val="33444F"/>
+                </a:solidFill>
+                <a:latin typeface="Calibri" pitchFamily="34" charset="0"/>
+                <a:ea typeface="Calibri" pitchFamily="34" charset="-122"/>
+                <a:cs typeface="Calibri" pitchFamily="34" charset="-120"/>
+              </a:rPr>
+              <a:t>E. ALT</a:t>
+            </a:r>
+            <a:endParaRPr lang="en-US" sz="1350" dirty="0"/>
+          </a:p>
+        </p:txBody>
+      </p:sp>
+      <p:sp>
+        <p:nvSpPr>
+          <p:cNvPr id="6" name="Shape 4"/>
+          <p:cNvSpPr/>
+          <p:nvPr/>
+        </p:nvSpPr>
+        <p:spPr>
+          <a:xfrm>
+            <a:off x="7201632" y="2395728"/>
+            <a:ext cx="4423136" cy="3246120"/>
+          </a:xfrm>
+          <a:prstGeom prst="roundRect">
+            <a:avLst>
+              <a:gd name="adj" fmla="val 2535"/>
+            </a:avLst>
+          </a:prstGeom>
+          <a:solidFill>
+            <a:srgbClr val="F1E8F7"/>
+          </a:solidFill>
+          <a:ln/>
+          <a:effectLst>
+            <a:outerShdw sx="100000" sy="100000" kx="0" ky="0" algn="bl" rotWithShape="0" blurRad="88900" dist="25400" dir="5400000">
+              <a:srgbClr val="22303C">
+                <a:alpha val="12000"/>
+              </a:srgbClr>
+            </a:outerShdw>
+          </a:effectLst>
+        </p:spPr>
+        <p:txBody>
+          <a:bodyPr/>
+          <a:p/>
+        </p:txBody>
+      </p:sp>
+      <p:sp>
+        <p:nvSpPr>
+          <p:cNvPr id="7" name="Text 5"/>
+          <p:cNvSpPr/>
+          <p:nvPr/>
+        </p:nvSpPr>
+        <p:spPr>
+          <a:xfrm>
+            <a:off x="7439376" y="2578608"/>
+            <a:ext cx="3965936" cy="457200"/>
+          </a:xfrm>
+          <a:prstGeom prst="rect">
+            <a:avLst/>
+          </a:prstGeom>
+          <a:noFill/>
+          <a:ln/>
+        </p:spPr>
+        <p:txBody>
+          <a:bodyPr wrap="square" lIns="0" tIns="0" rIns="0" bIns="0" rtlCol="0" anchor="ctr"/>
+          <a:lstStyle/>
+          <a:p>
+            <a:pPr indent="0" marL="0">
+              <a:buNone/>
+            </a:pPr>
+            <a:r>
+              <a:rPr lang="en-US" sz="1500" b="1" dirty="0">
+                <a:solidFill>
+                  <a:srgbClr val="6A1B9A"/>
+                </a:solidFill>
+                <a:latin typeface="Calibri" pitchFamily="34" charset="0"/>
+                <a:ea typeface="Calibri" pitchFamily="34" charset="-122"/>
+                <a:cs typeface="Calibri" pitchFamily="34" charset="-120"/>
+              </a:rPr>
+              <a:t>ANSWER  </a:t>
+            </a:r>
+            <a:pPr indent="0" marL="0">
+              <a:buNone/>
+            </a:pPr>
+            <a:r>
+              <a:rPr lang="en-US" sz="1500" b="1" dirty="0">
+                <a:solidFill>
+                  <a:srgbClr val="1B2A38"/>
+                </a:solidFill>
+                <a:latin typeface="Calibri" pitchFamily="34" charset="0"/>
+                <a:ea typeface="Calibri" pitchFamily="34" charset="-122"/>
+                <a:cs typeface="Calibri" pitchFamily="34" charset="-120"/>
+              </a:rPr>
+              <a:t>C — Anti-HBc</a:t>
+            </a:r>
+            <a:endParaRPr lang="en-US" sz="1500" dirty="0"/>
+          </a:p>
+        </p:txBody>
+      </p:sp>
+      <p:sp>
+        <p:nvSpPr>
+          <p:cNvPr id="8" name="Text 6"/>
+          <p:cNvSpPr/>
+          <p:nvPr/>
+        </p:nvSpPr>
+        <p:spPr>
+          <a:xfrm>
+            <a:off x="7439376" y="3127248"/>
+            <a:ext cx="3947648" cy="2377440"/>
+          </a:xfrm>
+          <a:prstGeom prst="rect">
+            <a:avLst/>
+          </a:prstGeom>
+          <a:noFill/>
+          <a:ln/>
+        </p:spPr>
+        <p:txBody>
+          <a:bodyPr wrap="square" lIns="0" tIns="0" rIns="0" bIns="0" rtlCol="0" anchor="t"/>
+          <a:lstStyle/>
+          <a:p>
+            <a:pPr algn="l" indent="0" marL="0">
+              <a:lnSpc>
+                <a:spcPct val="108000"/>
+              </a:lnSpc>
+              <a:buNone/>
+            </a:pPr>
+            <a:r>
+              <a:rPr lang="en-US" sz="1250" dirty="0">
+                <a:solidFill>
+                  <a:srgbClr val="33444F"/>
+                </a:solidFill>
+                <a:latin typeface="Calibri" pitchFamily="34" charset="0"/>
+                <a:ea typeface="Calibri" pitchFamily="34" charset="-122"/>
+                <a:cs typeface="Calibri" pitchFamily="34" charset="-120"/>
+              </a:rPr>
+              <a:t>Anti-HBc develops after natural infection but not after vaccination; anti-HBs alone can result from either.</a:t>
+            </a:r>
+            <a:endParaRPr lang="en-US" sz="1250" dirty="0"/>
+          </a:p>
+        </p:txBody>
+      </p:sp>
+      <p:sp>
+        <p:nvSpPr>
+          <p:cNvPr id="9" name="Text 7"/>
+          <p:cNvSpPr/>
+          <p:nvPr/>
+        </p:nvSpPr>
+        <p:spPr>
+          <a:xfrm>
+            <a:off x="566928" y="6473952"/>
+            <a:ext cx="7772400" cy="274320"/>
+          </a:xfrm>
+          <a:prstGeom prst="rect">
+            <a:avLst/>
+          </a:prstGeom>
+          <a:noFill/>
+          <a:ln/>
+        </p:spPr>
+        <p:txBody>
+          <a:bodyPr wrap="square" lIns="0" tIns="0" rIns="0" bIns="0" rtlCol="0" anchor="ctr"/>
+          <a:lstStyle/>
+          <a:p>
+            <a:pPr algn="l" indent="0" marL="0">
+              <a:buNone/>
+            </a:pPr>
+            <a:r>
+              <a:rPr lang="en-US" sz="850" dirty="0">
+                <a:solidFill>
+                  <a:srgbClr val="9AA8B4"/>
+                </a:solidFill>
+                <a:latin typeface="Calibri" pitchFamily="34" charset="0"/>
+                <a:ea typeface="Calibri" pitchFamily="34" charset="-122"/>
+                <a:cs typeface="Calibri" pitchFamily="34" charset="-120"/>
+              </a:rPr>
+              <a:t>Makassed General Hospital  ·  Department of Laboratory Medicine</a:t>
+            </a:r>
+            <a:endParaRPr lang="en-US" sz="850" dirty="0"/>
+          </a:p>
+        </p:txBody>
+      </p:sp>
+      <p:sp>
+        <p:nvSpPr>
+          <p:cNvPr id="10" name="Text 8"/>
+          <p:cNvSpPr/>
+          <p:nvPr/>
+        </p:nvSpPr>
+        <p:spPr>
+          <a:xfrm>
+            <a:off x="9814255" y="6473952"/>
+            <a:ext cx="1828800" cy="274320"/>
+          </a:xfrm>
+          <a:prstGeom prst="rect">
+            <a:avLst/>
+          </a:prstGeom>
+          <a:noFill/>
+          <a:ln/>
+        </p:spPr>
+        <p:txBody>
+          <a:bodyPr wrap="square" lIns="0" tIns="0" rIns="0" bIns="0" rtlCol="0" anchor="ctr"/>
+          <a:lstStyle/>
+          <a:p>
+            <a:pPr algn="r" indent="0" marL="0">
+              <a:buNone/>
+            </a:pPr>
+            <a:r>
+              <a:rPr lang="en-US" sz="850" dirty="0">
+                <a:solidFill>
+                  <a:srgbClr val="9AA8B4"/>
+                </a:solidFill>
+                <a:latin typeface="Calibri" pitchFamily="34" charset="0"/>
+                <a:ea typeface="Calibri" pitchFamily="34" charset="-122"/>
+                <a:cs typeface="Calibri" pitchFamily="34" charset="-120"/>
+              </a:rPr>
+              <a:t>CP Lecture Series</a:t>
+            </a:r>
+            <a:pPr algn="r" indent="0" marL="0">
+              <a:buNone/>
+            </a:pPr>
+            <a:r>
+              <a:rPr lang="en-US" sz="850" dirty="0">
+                <a:solidFill>
+                  <a:srgbClr val="DCE4EC"/>
+                </a:solidFill>
+                <a:latin typeface="Calibri" pitchFamily="34" charset="0"/>
+                <a:ea typeface="Calibri" pitchFamily="34" charset="-122"/>
+                <a:cs typeface="Calibri" pitchFamily="34" charset="-120"/>
+              </a:rPr>
+              <a:t>   ·   </a:t>
+            </a:r>
+            <a:pPr algn="r" indent="0" marL="0">
+              <a:buNone/>
+            </a:pPr>
+            <a:r>
+              <a:rPr lang="en-US" sz="850" b="1" dirty="0">
+                <a:solidFill>
+                  <a:srgbClr val="6A1B9A"/>
+                </a:solidFill>
+                <a:latin typeface="Calibri" pitchFamily="34" charset="0"/>
+                <a:ea typeface="Calibri" pitchFamily="34" charset="-122"/>
+                <a:cs typeface="Calibri" pitchFamily="34" charset="-120"/>
+              </a:rPr>
+              <a:t>16</a:t>
+            </a:r>
+            <a:endParaRPr lang="en-US" sz="850" dirty="0"/>
+          </a:p>
+        </p:txBody>
+      </p:sp>
+    </p:spTree>
+  </p:cSld>
+  <p:clrMapOvr>
+    <a:masterClrMapping/>
+  </p:clrMapOvr>
+</p:sld>
+</file>
+
 <file path=ppt/slides/slide3.xml><?xml version="1.0" encoding="utf-8"?>
 <p:sld xmlns:a="http://schemas.openxmlformats.org/drawingml/2006/main" xmlns:r="http://schemas.openxmlformats.org/officeDocument/2006/relationships" xmlns:p="http://schemas.openxmlformats.org/presentationml/2006/main">
   <p:cSld name="Slide 3">
@@ -12107,6 +13715,10 @@
             </a:outerShdw>
           </a:effectLst>
         </p:spPr>
+        <p:txBody>
+          <a:bodyPr/>
+          <a:p/>
+        </p:txBody>
       </p:sp>
       <p:sp>
         <p:nvSpPr>
@@ -12134,6 +13746,10 @@
             </a:outerShdw>
           </a:effectLst>
         </p:spPr>
+        <p:txBody>
+          <a:bodyPr/>
+          <a:p/>
+        </p:txBody>
       </p:sp>
       <p:sp>
         <p:nvSpPr>
@@ -12241,6 +13857,10 @@
             </a:outerShdw>
           </a:effectLst>
         </p:spPr>
+        <p:txBody>
+          <a:bodyPr/>
+          <a:p/>
+        </p:txBody>
       </p:sp>
       <p:sp>
         <p:nvSpPr>
@@ -12268,6 +13888,10 @@
             </a:outerShdw>
           </a:effectLst>
         </p:spPr>
+        <p:txBody>
+          <a:bodyPr/>
+          <a:p/>
+        </p:txBody>
       </p:sp>
       <p:sp>
         <p:nvSpPr>
@@ -12375,6 +13999,10 @@
             </a:outerShdw>
           </a:effectLst>
         </p:spPr>
+        <p:txBody>
+          <a:bodyPr/>
+          <a:p/>
+        </p:txBody>
       </p:sp>
       <p:sp>
         <p:nvSpPr>
@@ -12402,6 +14030,10 @@
             </a:outerShdw>
           </a:effectLst>
         </p:spPr>
+        <p:txBody>
+          <a:bodyPr/>
+          <a:p/>
+        </p:txBody>
       </p:sp>
       <p:sp>
         <p:nvSpPr>
@@ -12509,6 +14141,10 @@
             </a:outerShdw>
           </a:effectLst>
         </p:spPr>
+        <p:txBody>
+          <a:bodyPr/>
+          <a:p/>
+        </p:txBody>
       </p:sp>
       <p:sp>
         <p:nvSpPr>
@@ -12536,6 +14172,10 @@
             </a:outerShdw>
           </a:effectLst>
         </p:spPr>
+        <p:txBody>
+          <a:bodyPr/>
+          <a:p/>
+        </p:txBody>
       </p:sp>
       <p:sp>
         <p:nvSpPr>
@@ -12643,6 +14283,10 @@
             </a:outerShdw>
           </a:effectLst>
         </p:spPr>
+        <p:txBody>
+          <a:bodyPr/>
+          <a:p/>
+        </p:txBody>
       </p:sp>
       <p:sp>
         <p:nvSpPr>
@@ -12670,6 +14314,10 @@
             </a:outerShdw>
           </a:effectLst>
         </p:spPr>
+        <p:txBody>
+          <a:bodyPr/>
+          <a:p/>
+        </p:txBody>
       </p:sp>
       <p:sp>
         <p:nvSpPr>
@@ -12777,6 +14425,10 @@
             </a:outerShdw>
           </a:effectLst>
         </p:spPr>
+        <p:txBody>
+          <a:bodyPr/>
+          <a:p/>
+        </p:txBody>
       </p:sp>
       <p:sp>
         <p:nvSpPr>
@@ -12804,6 +14456,10 @@
             </a:outerShdw>
           </a:effectLst>
         </p:spPr>
+        <p:txBody>
+          <a:bodyPr/>
+          <a:p/>
+        </p:txBody>
       </p:sp>
       <p:sp>
         <p:nvSpPr>
@@ -13127,6 +14783,10 @@
             </a:outerShdw>
           </a:effectLst>
         </p:spPr>
+        <p:txBody>
+          <a:bodyPr/>
+          <a:p/>
+        </p:txBody>
       </p:sp>
       <p:sp>
         <p:nvSpPr>
@@ -13154,6 +14814,10 @@
             </a:outerShdw>
           </a:effectLst>
         </p:spPr>
+        <p:txBody>
+          <a:bodyPr/>
+          <a:p/>
+        </p:txBody>
       </p:sp>
       <p:sp>
         <p:nvSpPr>
@@ -13268,6 +14932,10 @@
           </a:solidFill>
           <a:ln/>
         </p:spPr>
+        <p:txBody>
+          <a:bodyPr/>
+          <a:p/>
+        </p:txBody>
       </p:sp>
       <p:sp>
         <p:nvSpPr>
@@ -13295,6 +14963,10 @@
             </a:outerShdw>
           </a:effectLst>
         </p:spPr>
+        <p:txBody>
+          <a:bodyPr/>
+          <a:p/>
+        </p:txBody>
       </p:sp>
       <p:sp>
         <p:nvSpPr>
@@ -13416,6 +15088,10 @@
             </a:outerShdw>
           </a:effectLst>
         </p:spPr>
+        <p:txBody>
+          <a:bodyPr/>
+          <a:p/>
+        </p:txBody>
       </p:sp>
       <p:sp>
         <p:nvSpPr>
@@ -13443,6 +15119,10 @@
             </a:outerShdw>
           </a:effectLst>
         </p:spPr>
+        <p:txBody>
+          <a:bodyPr/>
+          <a:p/>
+        </p:txBody>
       </p:sp>
       <p:sp>
         <p:nvSpPr>
@@ -13557,6 +15237,10 @@
           </a:solidFill>
           <a:ln/>
         </p:spPr>
+        <p:txBody>
+          <a:bodyPr/>
+          <a:p/>
+        </p:txBody>
       </p:sp>
       <p:sp>
         <p:nvSpPr>
@@ -13584,6 +15268,10 @@
             </a:outerShdw>
           </a:effectLst>
         </p:spPr>
+        <p:txBody>
+          <a:bodyPr/>
+          <a:p/>
+        </p:txBody>
       </p:sp>
       <p:sp>
         <p:nvSpPr>
@@ -13705,6 +15393,10 @@
             </a:outerShdw>
           </a:effectLst>
         </p:spPr>
+        <p:txBody>
+          <a:bodyPr/>
+          <a:p/>
+        </p:txBody>
       </p:sp>
       <p:sp>
         <p:nvSpPr>
@@ -13732,6 +15424,10 @@
             </a:outerShdw>
           </a:effectLst>
         </p:spPr>
+        <p:txBody>
+          <a:bodyPr/>
+          <a:p/>
+        </p:txBody>
       </p:sp>
       <p:sp>
         <p:nvSpPr>
@@ -13970,6 +15666,10 @@
           </a:solidFill>
           <a:ln/>
         </p:spPr>
+        <p:txBody>
+          <a:bodyPr/>
+          <a:p/>
+        </p:txBody>
       </p:sp>
       <p:sp>
         <p:nvSpPr>
@@ -13992,6 +15692,10 @@
           </a:solidFill>
           <a:ln/>
         </p:spPr>
+        <p:txBody>
+          <a:bodyPr/>
+          <a:p/>
+        </p:txBody>
       </p:sp>
       <p:sp>
         <p:nvSpPr>
@@ -14253,6 +15957,10 @@
             </a:outerShdw>
           </a:effectLst>
         </p:spPr>
+        <p:txBody>
+          <a:bodyPr/>
+          <a:p/>
+        </p:txBody>
       </p:sp>
       <p:pic>
         <p:nvPicPr>
@@ -14561,6 +16269,10 @@
             </a:outerShdw>
           </a:effectLst>
         </p:spPr>
+        <p:txBody>
+          <a:bodyPr/>
+          <a:p/>
+        </p:txBody>
       </p:sp>
       <p:sp>
         <p:nvSpPr>
@@ -14735,6 +16447,10 @@
             </a:outerShdw>
           </a:effectLst>
         </p:spPr>
+        <p:txBody>
+          <a:bodyPr/>
+          <a:p/>
+        </p:txBody>
       </p:sp>
       <p:sp>
         <p:nvSpPr>
@@ -15040,6 +16756,10 @@
           </a:solidFill>
           <a:ln/>
         </p:spPr>
+        <p:txBody>
+          <a:bodyPr/>
+          <a:p/>
+        </p:txBody>
       </p:sp>
       <p:sp>
         <p:nvSpPr>
@@ -15062,6 +16782,10 @@
           </a:solidFill>
           <a:ln/>
         </p:spPr>
+        <p:txBody>
+          <a:bodyPr/>
+          <a:p/>
+        </p:txBody>
       </p:sp>
       <p:sp>
         <p:nvSpPr>
@@ -15323,6 +17047,10 @@
             </a:outerShdw>
           </a:effectLst>
         </p:spPr>
+        <p:txBody>
+          <a:bodyPr/>
+          <a:p/>
+        </p:txBody>
       </p:sp>
       <p:pic>
         <p:nvPicPr>
